--- a/docs/Final_Presentation.pptx
+++ b/docs/Final_Presentation.pptx
@@ -39,6 +39,9 @@
     <p:sldId id="287" r:id="rId38"/>
     <p:sldId id="288" r:id="rId39"/>
     <p:sldId id="289" r:id="rId40"/>
+    <p:sldId id="290" r:id="rId41"/>
+    <p:sldId id="291" r:id="rId42"/>
+    <p:sldId id="292" r:id="rId43"/>
   </p:sldIdLst>
   <p:sldSz cx="12191695" cy="6858000" type="screen4x3"/>
   <p:notesSz cx="6858000" cy="9144000"/>
@@ -18219,7 +18222,7 @@
                 </a:solidFill>
                 <a:latin typeface="Helvetica Neue"/>
               </a:rPr>
-              <a:t>Final Demo</a:t>
+              <a:t>Frontend Web</a:t>
             </a:r>
           </a:p>
         </p:txBody>
@@ -18404,7 +18407,7 @@
                 </a:solidFill>
                 <a:latin typeface="Helvetica Neue"/>
               </a:rPr>
-              <a:t>Lo que vamos a mostrar</a:t>
+              <a:t>Arquitectura zero-server</a:t>
             </a:r>
           </a:p>
         </p:txBody>
@@ -18483,7 +18486,7 @@
                 </a:solidFill>
                 <a:latin typeface="Helvetica Neue"/>
               </a:rPr>
-              <a:t>6 · Final Demo</a:t>
+              <a:t>6 · Frontend Web</a:t>
             </a:r>
           </a:p>
         </p:txBody>
@@ -18531,253 +18534,55 @@
         </p:nvSpPr>
         <p:spPr>
           <a:xfrm>
-            <a:off x="2286000" y="1463040"/>
-            <a:ext cx="8229600" cy="457200"/>
-          </a:xfrm>
-          <a:prstGeom prst="rect">
-            <a:avLst/>
-          </a:prstGeom>
-          <a:noFill/>
-        </p:spPr>
-        <p:txBody>
-          <a:bodyPr wrap="square" lIns="0" rIns="0" tIns="0" bIns="0" anchor="t">
-            <a:spAutoFit/>
-          </a:bodyPr>
-          <a:lstStyle/>
-          <a:p>
-            <a:pPr algn="l"/>
-            <a:r>
-              <a:rPr sz="1800" b="0" i="0">
+            <a:off x="457200" y="1280160"/>
+            <a:ext cx="11247120" cy="1097280"/>
+          </a:xfrm>
+          <a:prstGeom prst="rect">
+            <a:avLst/>
+          </a:prstGeom>
+          <a:noFill/>
+        </p:spPr>
+        <p:txBody>
+          <a:bodyPr wrap="square" lIns="0" rIns="0" tIns="0" bIns="0" anchor="t">
+            <a:spAutoFit/>
+          </a:bodyPr>
+          <a:lstStyle/>
+          <a:p>
+            <a:pPr algn="ctr"/>
+            <a:r>
+              <a:rPr sz="3600" b="1" i="0">
                 <a:solidFill>
                   <a:srgbClr val="E8EEF2"/>
                 </a:solidFill>
                 <a:latin typeface="Helvetica Neue"/>
               </a:rPr>
-              <a:t>1.  Init identidades alice + bob</a:t>
-            </a:r>
-          </a:p>
-        </p:txBody>
-      </p:sp>
-      <p:sp>
-        <p:nvSpPr>
-          <p:cNvPr id="10" name="TextBox 9"/>
-          <p:cNvSpPr txBox="1"/>
-          <p:nvPr/>
-        </p:nvSpPr>
-        <p:spPr>
-          <a:xfrm>
-            <a:off x="2286000" y="1965960"/>
-            <a:ext cx="8229600" cy="457200"/>
-          </a:xfrm>
-          <a:prstGeom prst="rect">
-            <a:avLst/>
-          </a:prstGeom>
-          <a:noFill/>
-        </p:spPr>
-        <p:txBody>
-          <a:bodyPr wrap="square" lIns="0" rIns="0" tIns="0" bIns="0" anchor="t">
-            <a:spAutoFit/>
-          </a:bodyPr>
-          <a:lstStyle/>
-          <a:p>
-            <a:pPr algn="l"/>
-            <a:r>
-              <a:rPr sz="1800" b="0" i="0">
+              <a:t>Todo corre en el navegador.</a:t>
+            </a:r>
+          </a:p>
+          <a:p>
+            <a:pPr algn="ctr"/>
+            <a:r>
+              <a:rPr sz="3600" b="1" i="0">
                 <a:solidFill>
                   <a:srgbClr val="E8EEF2"/>
                 </a:solidFill>
                 <a:latin typeface="Helvetica Neue"/>
               </a:rPr>
-              <a:t>2.  Alice cifra y firma para Bob</a:t>
-            </a:r>
-          </a:p>
-        </p:txBody>
-      </p:sp>
-      <p:sp>
-        <p:nvSpPr>
-          <p:cNvPr id="11" name="TextBox 10"/>
-          <p:cNvSpPr txBox="1"/>
-          <p:nvPr/>
-        </p:nvSpPr>
-        <p:spPr>
-          <a:xfrm>
-            <a:off x="2286000" y="2468880"/>
-            <a:ext cx="8229600" cy="457200"/>
-          </a:xfrm>
-          <a:prstGeom prst="rect">
-            <a:avLst/>
-          </a:prstGeom>
-          <a:noFill/>
-        </p:spPr>
-        <p:txBody>
-          <a:bodyPr wrap="square" lIns="0" rIns="0" tIns="0" bIns="0" anchor="t">
-            <a:spAutoFit/>
-          </a:bodyPr>
-          <a:lstStyle/>
-          <a:p>
-            <a:pPr algn="l"/>
-            <a:r>
-              <a:rPr sz="1800" b="0" i="0">
-                <a:solidFill>
-                  <a:srgbClr val="E8EEF2"/>
-                </a:solidFill>
-                <a:latin typeface="Helvetica Neue"/>
-              </a:rPr>
-              <a:t>3.  Bob verify + decrypt → plaintext</a:t>
-            </a:r>
-          </a:p>
-        </p:txBody>
-      </p:sp>
-      <p:sp>
-        <p:nvSpPr>
-          <p:cNvPr id="12" name="TextBox 11"/>
-          <p:cNvSpPr txBox="1"/>
-          <p:nvPr/>
-        </p:nvSpPr>
-        <p:spPr>
-          <a:xfrm>
-            <a:off x="2286000" y="2971800"/>
-            <a:ext cx="8229600" cy="457200"/>
-          </a:xfrm>
-          <a:prstGeom prst="rect">
-            <a:avLst/>
-          </a:prstGeom>
-          <a:noFill/>
-        </p:spPr>
-        <p:txBody>
-          <a:bodyPr wrap="square" lIns="0" rIns="0" tIns="0" bIns="0" anchor="t">
-            <a:spAutoFit/>
-          </a:bodyPr>
-          <a:lstStyle/>
-          <a:p>
-            <a:pPr algn="l"/>
-            <a:r>
-              <a:rPr sz="1800" b="0" i="0">
-                <a:solidFill>
-                  <a:srgbClr val="E8EEF2"/>
-                </a:solidFill>
-                <a:latin typeface="Helvetica Neue"/>
-              </a:rPr>
-              <a:t>4.  Password incorrecto → InvalidTag</a:t>
-            </a:r>
-          </a:p>
-        </p:txBody>
-      </p:sp>
-      <p:sp>
-        <p:nvSpPr>
-          <p:cNvPr id="13" name="TextBox 12"/>
-          <p:cNvSpPr txBox="1"/>
-          <p:nvPr/>
-        </p:nvSpPr>
-        <p:spPr>
-          <a:xfrm>
-            <a:off x="2286000" y="3474720"/>
-            <a:ext cx="8229600" cy="457200"/>
-          </a:xfrm>
-          <a:prstGeom prst="rect">
-            <a:avLst/>
-          </a:prstGeom>
-          <a:noFill/>
-        </p:spPr>
-        <p:txBody>
-          <a:bodyPr wrap="square" lIns="0" rIns="0" tIns="0" bIns="0" anchor="t">
-            <a:spAutoFit/>
-          </a:bodyPr>
-          <a:lstStyle/>
-          <a:p>
-            <a:pPr algn="l"/>
-            <a:r>
-              <a:rPr sz="1800" b="0" i="0">
-                <a:solidFill>
-                  <a:srgbClr val="E8EEF2"/>
-                </a:solidFill>
-                <a:latin typeface="Helvetica Neue"/>
-              </a:rPr>
-              <a:t>5.  Contenedor modificado → InvalidSignature</a:t>
-            </a:r>
-          </a:p>
-        </p:txBody>
-      </p:sp>
-      <p:sp>
-        <p:nvSpPr>
-          <p:cNvPr id="14" name="TextBox 13"/>
-          <p:cNvSpPr txBox="1"/>
-          <p:nvPr/>
-        </p:nvSpPr>
-        <p:spPr>
-          <a:xfrm>
-            <a:off x="2286000" y="3977639"/>
-            <a:ext cx="8229600" cy="457200"/>
-          </a:xfrm>
-          <a:prstGeom prst="rect">
-            <a:avLst/>
-          </a:prstGeom>
-          <a:noFill/>
-        </p:spPr>
-        <p:txBody>
-          <a:bodyPr wrap="square" lIns="0" rIns="0" tIns="0" bIns="0" anchor="t">
-            <a:spAutoFit/>
-          </a:bodyPr>
-          <a:lstStyle/>
-          <a:p>
-            <a:pPr algn="l"/>
-            <a:r>
-              <a:rPr sz="1800" b="0" i="0">
-                <a:solidFill>
-                  <a:srgbClr val="E8EEF2"/>
-                </a:solidFill>
-                <a:latin typeface="Helvetica Neue"/>
-              </a:rPr>
-              <a:t>6.  Rotate keys de Alice</a:t>
-            </a:r>
-          </a:p>
-        </p:txBody>
-      </p:sp>
-      <p:sp>
-        <p:nvSpPr>
-          <p:cNvPr id="15" name="TextBox 14"/>
-          <p:cNvSpPr txBox="1"/>
-          <p:nvPr/>
-        </p:nvSpPr>
-        <p:spPr>
-          <a:xfrm>
-            <a:off x="2286000" y="4480560"/>
-            <a:ext cx="8229600" cy="457200"/>
-          </a:xfrm>
-          <a:prstGeom prst="rect">
-            <a:avLst/>
-          </a:prstGeom>
-          <a:noFill/>
-        </p:spPr>
-        <p:txBody>
-          <a:bodyPr wrap="square" lIns="0" rIns="0" tIns="0" bIns="0" anchor="t">
-            <a:spAutoFit/>
-          </a:bodyPr>
-          <a:lstStyle/>
-          <a:p>
-            <a:pPr algn="l"/>
-            <a:r>
-              <a:rPr sz="1800" b="0" i="0">
-                <a:solidFill>
-                  <a:srgbClr val="E8EEF2"/>
-                </a:solidFill>
-                <a:latin typeface="Helvetica Neue"/>
-              </a:rPr>
-              <a:t>7.  Backup → delete → restore</a:t>
-            </a:r>
-          </a:p>
-        </p:txBody>
-      </p:sp>
-      <p:sp>
-        <p:nvSpPr>
-          <p:cNvPr id="16" name="Rounded Rectangle 15"/>
+              <a:t>Cero backend.</a:t>
+            </a:r>
+          </a:p>
+        </p:txBody>
+      </p:sp>
+      <p:sp>
+        <p:nvSpPr>
+          <p:cNvPr id="10" name="Rounded Rectangle 9"/>
           <p:cNvSpPr/>
           <p:nvPr/>
         </p:nvSpPr>
         <p:spPr>
           <a:xfrm>
-            <a:off x="3200400" y="5486400"/>
-            <a:ext cx="5760720" cy="822960"/>
+            <a:off x="640080" y="2743200"/>
+            <a:ext cx="5303520" cy="3291840"/>
           </a:xfrm>
           <a:prstGeom prst="roundRect">
             <a:avLst>
@@ -18787,7 +18592,7 @@
           <a:solidFill>
             <a:srgbClr val="1A2129"/>
           </a:solidFill>
-          <a:ln w="12700">
+          <a:ln w="19050">
             <a:solidFill>
               <a:srgbClr val="00E5A8"/>
             </a:solidFill>
@@ -18816,35 +18621,571 @@
       </p:sp>
       <p:sp>
         <p:nvSpPr>
-          <p:cNvPr id="17" name="TextBox 16"/>
-          <p:cNvSpPr txBox="1"/>
-          <p:nvPr/>
-        </p:nvSpPr>
-        <p:spPr>
-          <a:xfrm>
-            <a:off x="3200400" y="5486400"/>
-            <a:ext cx="5760720" cy="822960"/>
-          </a:xfrm>
-          <a:prstGeom prst="rect">
-            <a:avLst/>
-          </a:prstGeom>
-          <a:noFill/>
-        </p:spPr>
-        <p:txBody>
-          <a:bodyPr wrap="square" lIns="0" rIns="0" tIns="0" bIns="0" anchor="ctr">
+          <p:cNvPr id="11" name="TextBox 10"/>
+          <p:cNvSpPr txBox="1"/>
+          <p:nvPr/>
+        </p:nvSpPr>
+        <p:spPr>
+          <a:xfrm>
+            <a:off x="914400" y="2971800"/>
+            <a:ext cx="5303520" cy="457200"/>
+          </a:xfrm>
+          <a:prstGeom prst="rect">
+            <a:avLst/>
+          </a:prstGeom>
+          <a:noFill/>
+        </p:spPr>
+        <p:txBody>
+          <a:bodyPr wrap="square" lIns="0" rIns="0" tIns="0" bIns="0" anchor="t">
+            <a:spAutoFit/>
+          </a:bodyPr>
+          <a:lstStyle/>
+          <a:p>
+            <a:pPr algn="l"/>
+            <a:r>
+              <a:rPr sz="2000" b="1" i="0">
+                <a:solidFill>
+                  <a:srgbClr val="00E5A8"/>
+                </a:solidFill>
+                <a:latin typeface="Helvetica Neue"/>
+              </a:rPr>
+              <a:t>Stack</a:t>
+            </a:r>
+          </a:p>
+        </p:txBody>
+      </p:sp>
+      <p:sp>
+        <p:nvSpPr>
+          <p:cNvPr id="12" name="TextBox 11"/>
+          <p:cNvSpPr txBox="1"/>
+          <p:nvPr/>
+        </p:nvSpPr>
+        <p:spPr>
+          <a:xfrm>
+            <a:off x="914400" y="3566160"/>
+            <a:ext cx="5303520" cy="365760"/>
+          </a:xfrm>
+          <a:prstGeom prst="rect">
+            <a:avLst/>
+          </a:prstGeom>
+          <a:noFill/>
+        </p:spPr>
+        <p:txBody>
+          <a:bodyPr wrap="square" lIns="0" rIns="0" tIns="0" bIns="0" anchor="t">
+            <a:spAutoFit/>
+          </a:bodyPr>
+          <a:lstStyle/>
+          <a:p>
+            <a:pPr algn="l"/>
+            <a:r>
+              <a:rPr sz="1100" b="0" i="0">
+                <a:solidFill>
+                  <a:srgbClr val="E8EEF2"/>
+                </a:solidFill>
+                <a:latin typeface="Helvetica Neue"/>
+              </a:rPr>
+              <a:t>● Pyodide v0.27.2 — CPython en WASM</a:t>
+            </a:r>
+          </a:p>
+        </p:txBody>
+      </p:sp>
+      <p:sp>
+        <p:nvSpPr>
+          <p:cNvPr id="13" name="TextBox 12"/>
+          <p:cNvSpPr txBox="1"/>
+          <p:nvPr/>
+        </p:nvSpPr>
+        <p:spPr>
+          <a:xfrm>
+            <a:off x="914400" y="3931920"/>
+            <a:ext cx="5303520" cy="365760"/>
+          </a:xfrm>
+          <a:prstGeom prst="rect">
+            <a:avLst/>
+          </a:prstGeom>
+          <a:noFill/>
+        </p:spPr>
+        <p:txBody>
+          <a:bodyPr wrap="square" lIns="0" rIns="0" tIns="0" bIns="0" anchor="t">
+            <a:spAutoFit/>
+          </a:bodyPr>
+          <a:lstStyle/>
+          <a:p>
+            <a:pPr algn="l"/>
+            <a:r>
+              <a:rPr sz="1100" b="0" i="0">
+                <a:solidFill>
+                  <a:srgbClr val="E8EEF2"/>
+                </a:solidFill>
+                <a:latin typeface="Helvetica Neue"/>
+              </a:rPr>
+              <a:t>● cryptography (wheel oficial)</a:t>
+            </a:r>
+          </a:p>
+        </p:txBody>
+      </p:sp>
+      <p:sp>
+        <p:nvSpPr>
+          <p:cNvPr id="14" name="TextBox 13"/>
+          <p:cNvSpPr txBox="1"/>
+          <p:nvPr/>
+        </p:nvSpPr>
+        <p:spPr>
+          <a:xfrm>
+            <a:off x="914400" y="4297680"/>
+            <a:ext cx="5303520" cy="365760"/>
+          </a:xfrm>
+          <a:prstGeom prst="rect">
+            <a:avLst/>
+          </a:prstGeom>
+          <a:noFill/>
+        </p:spPr>
+        <p:txBody>
+          <a:bodyPr wrap="square" lIns="0" rIns="0" tIns="0" bIns="0" anchor="t">
+            <a:spAutoFit/>
+          </a:bodyPr>
+          <a:lstStyle/>
+          <a:p>
+            <a:pPr algn="l"/>
+            <a:r>
+              <a:rPr sz="1100" b="0" i="0">
+                <a:solidFill>
+                  <a:srgbClr val="E8EEF2"/>
+                </a:solidFill>
+                <a:latin typeface="Helvetica Neue"/>
+              </a:rPr>
+              <a:t>● HTML/CSS/JS vanilla — sin frameworks</a:t>
+            </a:r>
+          </a:p>
+        </p:txBody>
+      </p:sp>
+      <p:sp>
+        <p:nvSpPr>
+          <p:cNvPr id="15" name="TextBox 14"/>
+          <p:cNvSpPr txBox="1"/>
+          <p:nvPr/>
+        </p:nvSpPr>
+        <p:spPr>
+          <a:xfrm>
+            <a:off x="914400" y="4663440"/>
+            <a:ext cx="5303520" cy="365760"/>
+          </a:xfrm>
+          <a:prstGeom prst="rect">
+            <a:avLst/>
+          </a:prstGeom>
+          <a:noFill/>
+        </p:spPr>
+        <p:txBody>
+          <a:bodyPr wrap="square" lIns="0" rIns="0" tIns="0" bIns="0" anchor="t">
+            <a:spAutoFit/>
+          </a:bodyPr>
+          <a:lstStyle/>
+          <a:p>
+            <a:pPr algn="l"/>
+            <a:r>
+              <a:rPr sz="1100" b="0" i="0">
+                <a:solidFill>
+                  <a:srgbClr val="E8EEF2"/>
+                </a:solidFill>
+                <a:latin typeface="Helvetica Neue"/>
+              </a:rPr>
+              <a:t>● IndexedDB via IDBFS → /keystore</a:t>
+            </a:r>
+          </a:p>
+        </p:txBody>
+      </p:sp>
+      <p:sp>
+        <p:nvSpPr>
+          <p:cNvPr id="16" name="TextBox 15"/>
+          <p:cNvSpPr txBox="1"/>
+          <p:nvPr/>
+        </p:nvSpPr>
+        <p:spPr>
+          <a:xfrm>
+            <a:off x="914400" y="5029200"/>
+            <a:ext cx="5303520" cy="365760"/>
+          </a:xfrm>
+          <a:prstGeom prst="rect">
+            <a:avLst/>
+          </a:prstGeom>
+          <a:noFill/>
+        </p:spPr>
+        <p:txBody>
+          <a:bodyPr wrap="square" lIns="0" rIns="0" tIns="0" bIns="0" anchor="t">
+            <a:spAutoFit/>
+          </a:bodyPr>
+          <a:lstStyle/>
+          <a:p>
+            <a:pPr algn="l"/>
+            <a:r>
+              <a:rPr sz="1100" b="0" i="0">
+                <a:solidFill>
+                  <a:srgbClr val="E8EEF2"/>
+                </a:solidFill>
+                <a:latin typeface="Helvetica Neue"/>
+              </a:rPr>
+              <a:t>● GitHub Pages (estático, sin servidor)</a:t>
+            </a:r>
+          </a:p>
+        </p:txBody>
+      </p:sp>
+      <p:sp>
+        <p:nvSpPr>
+          <p:cNvPr id="17" name="Rounded Rectangle 16"/>
+          <p:cNvSpPr/>
+          <p:nvPr/>
+        </p:nvSpPr>
+        <p:spPr>
+          <a:xfrm>
+            <a:off x="6217920" y="2743200"/>
+            <a:ext cx="5303520" cy="3291840"/>
+          </a:xfrm>
+          <a:prstGeom prst="roundRect">
+            <a:avLst>
+              <a:gd name="adj" fmla="val 8000"/>
+            </a:avLst>
+          </a:prstGeom>
+          <a:solidFill>
+            <a:srgbClr val="1A2129"/>
+          </a:solidFill>
+          <a:ln w="19050">
+            <a:solidFill>
+              <a:srgbClr val="6C8EFF"/>
+            </a:solidFill>
+          </a:ln>
+          <a:effectLst/>
+        </p:spPr>
+        <p:style>
+          <a:lnRef idx="1">
+            <a:schemeClr val="accent1"/>
+          </a:lnRef>
+          <a:fillRef idx="3">
+            <a:schemeClr val="accent1"/>
+          </a:fillRef>
+          <a:effectRef idx="2">
+            <a:schemeClr val="accent1"/>
+          </a:effectRef>
+          <a:fontRef idx="minor">
+            <a:schemeClr val="lt1"/>
+          </a:fontRef>
+        </p:style>
+        <p:txBody>
+          <a:bodyPr rtlCol="0" anchor="ctr"/>
+          <a:lstStyle/>
+          <a:p/>
+        </p:txBody>
+      </p:sp>
+      <p:sp>
+        <p:nvSpPr>
+          <p:cNvPr id="18" name="TextBox 17"/>
+          <p:cNvSpPr txBox="1"/>
+          <p:nvPr/>
+        </p:nvSpPr>
+        <p:spPr>
+          <a:xfrm>
+            <a:off x="6492240" y="2971800"/>
+            <a:ext cx="5303520" cy="457200"/>
+          </a:xfrm>
+          <a:prstGeom prst="rect">
+            <a:avLst/>
+          </a:prstGeom>
+          <a:noFill/>
+        </p:spPr>
+        <p:txBody>
+          <a:bodyPr wrap="square" lIns="0" rIns="0" tIns="0" bIns="0" anchor="t">
+            <a:spAutoFit/>
+          </a:bodyPr>
+          <a:lstStyle/>
+          <a:p>
+            <a:pPr algn="l"/>
+            <a:r>
+              <a:rPr sz="2000" b="1" i="0">
+                <a:solidFill>
+                  <a:srgbClr val="6C8EFF"/>
+                </a:solidFill>
+                <a:latin typeface="Helvetica Neue"/>
+              </a:rPr>
+              <a:t>Zero-divergence</a:t>
+            </a:r>
+          </a:p>
+        </p:txBody>
+      </p:sp>
+      <p:sp>
+        <p:nvSpPr>
+          <p:cNvPr id="19" name="TextBox 18"/>
+          <p:cNvSpPr txBox="1"/>
+          <p:nvPr/>
+        </p:nvSpPr>
+        <p:spPr>
+          <a:xfrm>
+            <a:off x="6492240" y="3566160"/>
+            <a:ext cx="5303520" cy="365760"/>
+          </a:xfrm>
+          <a:prstGeom prst="rect">
+            <a:avLst/>
+          </a:prstGeom>
+          <a:noFill/>
+        </p:spPr>
+        <p:txBody>
+          <a:bodyPr wrap="square" lIns="0" rIns="0" tIns="0" bIns="0" anchor="t">
+            <a:spAutoFit/>
+          </a:bodyPr>
+          <a:lstStyle/>
+          <a:p>
+            <a:pPr algn="l"/>
+            <a:r>
+              <a:rPr sz="1100" b="0" i="0">
+                <a:solidFill>
+                  <a:srgbClr val="E8EEF2"/>
+                </a:solidFill>
+                <a:latin typeface="Helvetica Neue"/>
+              </a:rPr>
+              <a:t>El workflow Pages hace:</a:t>
+            </a:r>
+          </a:p>
+        </p:txBody>
+      </p:sp>
+      <p:sp>
+        <p:nvSpPr>
+          <p:cNvPr id="20" name="TextBox 19"/>
+          <p:cNvSpPr txBox="1"/>
+          <p:nvPr/>
+        </p:nvSpPr>
+        <p:spPr>
+          <a:xfrm>
+            <a:off x="6492240" y="3931920"/>
+            <a:ext cx="5303520" cy="365760"/>
+          </a:xfrm>
+          <a:prstGeom prst="rect">
+            <a:avLst/>
+          </a:prstGeom>
+          <a:noFill/>
+        </p:spPr>
+        <p:txBody>
+          <a:bodyPr wrap="square" lIns="0" rIns="0" tIns="0" bIns="0" anchor="t">
+            <a:spAutoFit/>
+          </a:bodyPr>
+          <a:lstStyle/>
+          <a:p>
+            <a:pPr algn="l"/>
+            <a:r>
+              <a:rPr sz="1100" b="0" i="0">
+                <a:solidFill>
+                  <a:srgbClr val="E8EEF2"/>
+                </a:solidFill>
+                <a:latin typeface="Menlo"/>
+              </a:rPr>
+              <a:t>cp -r crypto _site/crypto</a:t>
+            </a:r>
+          </a:p>
+        </p:txBody>
+      </p:sp>
+      <p:sp>
+        <p:nvSpPr>
+          <p:cNvPr id="21" name="TextBox 20"/>
+          <p:cNvSpPr txBox="1"/>
+          <p:nvPr/>
+        </p:nvSpPr>
+        <p:spPr>
+          <a:xfrm>
+            <a:off x="6492240" y="4297680"/>
+            <a:ext cx="5303520" cy="365760"/>
+          </a:xfrm>
+          <a:prstGeom prst="rect">
+            <a:avLst/>
+          </a:prstGeom>
+          <a:noFill/>
+        </p:spPr>
+        <p:txBody>
+          <a:bodyPr wrap="square" lIns="0" rIns="0" tIns="0" bIns="0" anchor="t">
+            <a:spAutoFit/>
+          </a:bodyPr>
+          <a:lstStyle/>
+          <a:p>
+            <a:pPr algn="l"/>
+            <a:r>
+              <a:rPr sz="1100" b="0" i="0">
+                <a:solidFill>
+                  <a:srgbClr val="E8EEF2"/>
+                </a:solidFill>
+                <a:latin typeface="Helvetica Neue"/>
+              </a:rPr>
+              <a:t/>
+            </a:r>
+          </a:p>
+        </p:txBody>
+      </p:sp>
+      <p:sp>
+        <p:nvSpPr>
+          <p:cNvPr id="22" name="TextBox 21"/>
+          <p:cNvSpPr txBox="1"/>
+          <p:nvPr/>
+        </p:nvSpPr>
+        <p:spPr>
+          <a:xfrm>
+            <a:off x="6492240" y="4663440"/>
+            <a:ext cx="5303520" cy="365760"/>
+          </a:xfrm>
+          <a:prstGeom prst="rect">
+            <a:avLst/>
+          </a:prstGeom>
+          <a:noFill/>
+        </p:spPr>
+        <p:txBody>
+          <a:bodyPr wrap="square" lIns="0" rIns="0" tIns="0" bIns="0" anchor="t">
+            <a:spAutoFit/>
+          </a:bodyPr>
+          <a:lstStyle/>
+          <a:p>
+            <a:pPr algn="l"/>
+            <a:r>
+              <a:rPr sz="1100" b="0" i="0">
+                <a:solidFill>
+                  <a:srgbClr val="E8EEF2"/>
+                </a:solidFill>
+                <a:latin typeface="Helvetica Neue"/>
+              </a:rPr>
+              <a:t>El frontend y el CLI ejecutan</a:t>
+            </a:r>
+          </a:p>
+        </p:txBody>
+      </p:sp>
+      <p:sp>
+        <p:nvSpPr>
+          <p:cNvPr id="23" name="TextBox 22"/>
+          <p:cNvSpPr txBox="1"/>
+          <p:nvPr/>
+        </p:nvSpPr>
+        <p:spPr>
+          <a:xfrm>
+            <a:off x="6492240" y="5029200"/>
+            <a:ext cx="5303520" cy="365760"/>
+          </a:xfrm>
+          <a:prstGeom prst="rect">
+            <a:avLst/>
+          </a:prstGeom>
+          <a:noFill/>
+        </p:spPr>
+        <p:txBody>
+          <a:bodyPr wrap="square" lIns="0" rIns="0" tIns="0" bIns="0" anchor="t">
+            <a:spAutoFit/>
+          </a:bodyPr>
+          <a:lstStyle/>
+          <a:p>
+            <a:pPr algn="l"/>
+            <a:r>
+              <a:rPr sz="1100" b="0" i="0">
+                <a:solidFill>
+                  <a:srgbClr val="E8EEF2"/>
+                </a:solidFill>
+                <a:latin typeface="Helvetica Neue"/>
+              </a:rPr>
+              <a:t>los mismos archivos .py.</a:t>
+            </a:r>
+          </a:p>
+        </p:txBody>
+      </p:sp>
+      <p:sp>
+        <p:nvSpPr>
+          <p:cNvPr id="24" name="TextBox 23"/>
+          <p:cNvSpPr txBox="1"/>
+          <p:nvPr/>
+        </p:nvSpPr>
+        <p:spPr>
+          <a:xfrm>
+            <a:off x="6492240" y="5394960"/>
+            <a:ext cx="5303520" cy="365760"/>
+          </a:xfrm>
+          <a:prstGeom prst="rect">
+            <a:avLst/>
+          </a:prstGeom>
+          <a:noFill/>
+        </p:spPr>
+        <p:txBody>
+          <a:bodyPr wrap="square" lIns="0" rIns="0" tIns="0" bIns="0" anchor="t">
+            <a:spAutoFit/>
+          </a:bodyPr>
+          <a:lstStyle/>
+          <a:p>
+            <a:pPr algn="l"/>
+            <a:r>
+              <a:rPr sz="1100" b="0" i="0">
+                <a:solidFill>
+                  <a:srgbClr val="E8EEF2"/>
+                </a:solidFill>
+                <a:latin typeface="Helvetica Neue"/>
+              </a:rPr>
+              <a:t>Los 300 tests del backend cubren</a:t>
+            </a:r>
+          </a:p>
+        </p:txBody>
+      </p:sp>
+      <p:sp>
+        <p:nvSpPr>
+          <p:cNvPr id="25" name="TextBox 24"/>
+          <p:cNvSpPr txBox="1"/>
+          <p:nvPr/>
+        </p:nvSpPr>
+        <p:spPr>
+          <a:xfrm>
+            <a:off x="6492240" y="5760720"/>
+            <a:ext cx="5303520" cy="365760"/>
+          </a:xfrm>
+          <a:prstGeom prst="rect">
+            <a:avLst/>
+          </a:prstGeom>
+          <a:noFill/>
+        </p:spPr>
+        <p:txBody>
+          <a:bodyPr wrap="square" lIns="0" rIns="0" tIns="0" bIns="0" anchor="t">
+            <a:spAutoFit/>
+          </a:bodyPr>
+          <a:lstStyle/>
+          <a:p>
+            <a:pPr algn="l"/>
+            <a:r>
+              <a:rPr sz="1100" b="0" i="0">
+                <a:solidFill>
+                  <a:srgbClr val="E8EEF2"/>
+                </a:solidFill>
+                <a:latin typeface="Helvetica Neue"/>
+              </a:rPr>
+              <a:t>la lógica del navegador.</a:t>
+            </a:r>
+          </a:p>
+        </p:txBody>
+      </p:sp>
+      <p:sp>
+        <p:nvSpPr>
+          <p:cNvPr id="26" name="TextBox 25"/>
+          <p:cNvSpPr txBox="1"/>
+          <p:nvPr/>
+        </p:nvSpPr>
+        <p:spPr>
+          <a:xfrm>
+            <a:off x="457200" y="6263640"/>
+            <a:ext cx="11247120" cy="274320"/>
+          </a:xfrm>
+          <a:prstGeom prst="rect">
+            <a:avLst/>
+          </a:prstGeom>
+          <a:noFill/>
+        </p:spPr>
+        <p:txBody>
+          <a:bodyPr wrap="square" lIns="0" rIns="0" tIns="0" bIns="0" anchor="t">
             <a:spAutoFit/>
           </a:bodyPr>
           <a:lstStyle/>
           <a:p>
             <a:pPr algn="ctr"/>
             <a:r>
-              <a:rPr sz="1400" b="0" i="0">
-                <a:solidFill>
-                  <a:srgbClr val="00E5A8"/>
+              <a:rPr sz="1000" b="0" i="0">
+                <a:solidFill>
+                  <a:srgbClr val="8B96A3"/>
                 </a:solidFill>
                 <a:latin typeface="Menlo"/>
               </a:rPr>
-              <a:t>python demo_d6.py    ·    bash verificar_d6.sh</a:t>
+              <a:t>milliyx.github.io/Cryptography</a:t>
             </a:r>
           </a:p>
         </p:txBody>
@@ -19029,7 +19370,7 @@
                 </a:solidFill>
                 <a:latin typeface="Helvetica Neue"/>
               </a:rPr>
-              <a:t>Estado final</a:t>
+              <a:t>Defensas del frontend</a:t>
             </a:r>
           </a:p>
         </p:txBody>
@@ -19108,7 +19449,7 @@
                 </a:solidFill>
                 <a:latin typeface="Helvetica Neue"/>
               </a:rPr>
-              <a:t>6 · Final Demo</a:t>
+              <a:t>6 · Frontend Web</a:t>
             </a:r>
           </a:p>
         </p:txBody>
@@ -19150,84 +19491,14 @@
       </p:sp>
       <p:sp>
         <p:nvSpPr>
-          <p:cNvPr id="9" name="TextBox 8"/>
-          <p:cNvSpPr txBox="1"/>
-          <p:nvPr/>
-        </p:nvSpPr>
-        <p:spPr>
-          <a:xfrm>
-            <a:off x="457200" y="1280160"/>
-            <a:ext cx="11247120" cy="2286000"/>
-          </a:xfrm>
-          <a:prstGeom prst="rect">
-            <a:avLst/>
-          </a:prstGeom>
-          <a:noFill/>
-        </p:spPr>
-        <p:txBody>
-          <a:bodyPr wrap="square" lIns="0" rIns="0" tIns="0" bIns="0" anchor="t">
-            <a:spAutoFit/>
-          </a:bodyPr>
-          <a:lstStyle/>
-          <a:p>
-            <a:pPr algn="ctr"/>
-            <a:r>
-              <a:rPr sz="12000" b="1" i="0">
-                <a:solidFill>
-                  <a:srgbClr val="00E5A8"/>
-                </a:solidFill>
-                <a:latin typeface="Helvetica Neue"/>
-              </a:rPr>
-              <a:t>300 / 300</a:t>
-            </a:r>
-          </a:p>
-        </p:txBody>
-      </p:sp>
-      <p:sp>
-        <p:nvSpPr>
-          <p:cNvPr id="10" name="TextBox 9"/>
-          <p:cNvSpPr txBox="1"/>
-          <p:nvPr/>
-        </p:nvSpPr>
-        <p:spPr>
-          <a:xfrm>
-            <a:off x="457200" y="4023360"/>
-            <a:ext cx="11247120" cy="457200"/>
-          </a:xfrm>
-          <a:prstGeom prst="rect">
-            <a:avLst/>
-          </a:prstGeom>
-          <a:noFill/>
-        </p:spPr>
-        <p:txBody>
-          <a:bodyPr wrap="square" lIns="0" rIns="0" tIns="0" bIns="0" anchor="t">
-            <a:spAutoFit/>
-          </a:bodyPr>
-          <a:lstStyle/>
-          <a:p>
-            <a:pPr algn="ctr"/>
-            <a:r>
-              <a:rPr sz="1800" b="0" i="0">
-                <a:solidFill>
-                  <a:srgbClr val="8B96A3"/>
-                </a:solidFill>
-                <a:latin typeface="Helvetica Neue"/>
-              </a:rPr>
-              <a:t>tests verdes</a:t>
-            </a:r>
-          </a:p>
-        </p:txBody>
-      </p:sp>
-      <p:sp>
-        <p:nvSpPr>
-          <p:cNvPr id="11" name="Rounded Rectangle 10"/>
+          <p:cNvPr id="9" name="Rounded Rectangle 8"/>
           <p:cNvSpPr/>
           <p:nvPr/>
         </p:nvSpPr>
         <p:spPr>
           <a:xfrm>
-            <a:off x="1371600" y="4937760"/>
-            <a:ext cx="1920240" cy="1280160"/>
+            <a:off x="640080" y="1280160"/>
+            <a:ext cx="5303520" cy="3931920"/>
           </a:xfrm>
           <a:prstGeom prst="roundRect">
             <a:avLst>
@@ -19237,8 +19508,10 @@
           <a:solidFill>
             <a:srgbClr val="1A2129"/>
           </a:solidFill>
-          <a:ln>
-            <a:noFill/>
+          <a:ln w="19050">
+            <a:solidFill>
+              <a:srgbClr val="00E5A8"/>
+            </a:solidFill>
           </a:ln>
           <a:effectLst/>
         </p:spPr>
@@ -19264,35 +19537,105 @@
       </p:sp>
       <p:sp>
         <p:nvSpPr>
+          <p:cNvPr id="10" name="TextBox 9"/>
+          <p:cNvSpPr txBox="1"/>
+          <p:nvPr/>
+        </p:nvSpPr>
+        <p:spPr>
+          <a:xfrm>
+            <a:off x="914400" y="1508760"/>
+            <a:ext cx="5303520" cy="457200"/>
+          </a:xfrm>
+          <a:prstGeom prst="rect">
+            <a:avLst/>
+          </a:prstGeom>
+          <a:noFill/>
+        </p:spPr>
+        <p:txBody>
+          <a:bodyPr wrap="square" lIns="0" rIns="0" tIns="0" bIns="0" anchor="t">
+            <a:spAutoFit/>
+          </a:bodyPr>
+          <a:lstStyle/>
+          <a:p>
+            <a:pPr algn="l"/>
+            <a:r>
+              <a:rPr sz="1800" b="1" i="0">
+                <a:solidFill>
+                  <a:srgbClr val="00E5A8"/>
+                </a:solidFill>
+                <a:latin typeface="Helvetica Neue"/>
+              </a:rPr>
+              <a:t>Lo que mantiene</a:t>
+            </a:r>
+          </a:p>
+        </p:txBody>
+      </p:sp>
+      <p:sp>
+        <p:nvSpPr>
+          <p:cNvPr id="11" name="TextBox 10"/>
+          <p:cNvSpPr txBox="1"/>
+          <p:nvPr/>
+        </p:nvSpPr>
+        <p:spPr>
+          <a:xfrm>
+            <a:off x="914400" y="2148840"/>
+            <a:ext cx="5303520" cy="457200"/>
+          </a:xfrm>
+          <a:prstGeom prst="rect">
+            <a:avLst/>
+          </a:prstGeom>
+          <a:noFill/>
+        </p:spPr>
+        <p:txBody>
+          <a:bodyPr wrap="square" lIns="0" rIns="0" tIns="0" bIns="0" anchor="t">
+            <a:spAutoFit/>
+          </a:bodyPr>
+          <a:lstStyle/>
+          <a:p>
+            <a:pPr algn="l"/>
+            <a:r>
+              <a:rPr sz="1200" b="0" i="0">
+                <a:solidFill>
+                  <a:srgbClr val="E8EEF2"/>
+                </a:solidFill>
+                <a:latin typeface="Helvetica Neue"/>
+              </a:rPr>
+              <a:t>✓  Verify-first del D5</a:t>
+            </a:r>
+          </a:p>
+        </p:txBody>
+      </p:sp>
+      <p:sp>
+        <p:nvSpPr>
           <p:cNvPr id="12" name="TextBox 11"/>
           <p:cNvSpPr txBox="1"/>
           <p:nvPr/>
         </p:nvSpPr>
         <p:spPr>
           <a:xfrm>
-            <a:off x="1371600" y="5120640"/>
-            <a:ext cx="1920240" cy="640080"/>
-          </a:xfrm>
-          <a:prstGeom prst="rect">
-            <a:avLst/>
-          </a:prstGeom>
-          <a:noFill/>
-        </p:spPr>
-        <p:txBody>
-          <a:bodyPr wrap="square" lIns="0" rIns="0" tIns="0" bIns="0" anchor="t">
-            <a:spAutoFit/>
-          </a:bodyPr>
-          <a:lstStyle/>
-          <a:p>
-            <a:pPr algn="ctr"/>
-            <a:r>
-              <a:rPr sz="2800" b="1" i="0">
-                <a:solidFill>
-                  <a:srgbClr val="00E5A8"/>
-                </a:solidFill>
-                <a:latin typeface="Helvetica Neue"/>
-              </a:rPr>
-              <a:t>4500</a:t>
+            <a:off x="914400" y="2651760"/>
+            <a:ext cx="5303520" cy="457200"/>
+          </a:xfrm>
+          <a:prstGeom prst="rect">
+            <a:avLst/>
+          </a:prstGeom>
+          <a:noFill/>
+        </p:spPr>
+        <p:txBody>
+          <a:bodyPr wrap="square" lIns="0" rIns="0" tIns="0" bIns="0" anchor="t">
+            <a:spAutoFit/>
+          </a:bodyPr>
+          <a:lstStyle/>
+          <a:p>
+            <a:pPr algn="l"/>
+            <a:r>
+              <a:rPr sz="1200" b="0" i="0">
+                <a:solidFill>
+                  <a:srgbClr val="E8EEF2"/>
+                </a:solidFill>
+                <a:latin typeface="Helvetica Neue"/>
+              </a:rPr>
+              <a:t>✓  AAD del DEM (D2/D3)</a:t>
             </a:r>
           </a:p>
         </p:txBody>
@@ -19305,43 +19648,113 @@
         </p:nvSpPr>
         <p:spPr>
           <a:xfrm>
-            <a:off x="1371600" y="5760720"/>
-            <a:ext cx="1920240" cy="365760"/>
-          </a:xfrm>
-          <a:prstGeom prst="rect">
-            <a:avLst/>
-          </a:prstGeom>
-          <a:noFill/>
-        </p:spPr>
-        <p:txBody>
-          <a:bodyPr wrap="square" lIns="0" rIns="0" tIns="0" bIns="0" anchor="t">
-            <a:spAutoFit/>
-          </a:bodyPr>
-          <a:lstStyle/>
-          <a:p>
-            <a:pPr algn="ctr"/>
-            <a:r>
-              <a:rPr sz="1000" b="0" i="0">
-                <a:solidFill>
-                  <a:srgbClr val="8B96A3"/>
-                </a:solidFill>
-                <a:latin typeface="Helvetica Neue"/>
-              </a:rPr>
-              <a:t>líneas Python</a:t>
-            </a:r>
-          </a:p>
-        </p:txBody>
-      </p:sp>
-      <p:sp>
-        <p:nvSpPr>
-          <p:cNvPr id="14" name="Rounded Rectangle 13"/>
+            <a:off x="914400" y="3154679"/>
+            <a:ext cx="5303520" cy="457200"/>
+          </a:xfrm>
+          <a:prstGeom prst="rect">
+            <a:avLst/>
+          </a:prstGeom>
+          <a:noFill/>
+        </p:spPr>
+        <p:txBody>
+          <a:bodyPr wrap="square" lIns="0" rIns="0" tIns="0" bIns="0" anchor="t">
+            <a:spAutoFit/>
+          </a:bodyPr>
+          <a:lstStyle/>
+          <a:p>
+            <a:pPr algn="l"/>
+            <a:r>
+              <a:rPr sz="1200" b="0" i="0">
+                <a:solidFill>
+                  <a:srgbClr val="E8EEF2"/>
+                </a:solidFill>
+                <a:latin typeface="Helvetica Neue"/>
+              </a:rPr>
+              <a:t>✓  Fail-closed: InvalidTag/InvalidSignature</a:t>
+            </a:r>
+          </a:p>
+        </p:txBody>
+      </p:sp>
+      <p:sp>
+        <p:nvSpPr>
+          <p:cNvPr id="14" name="TextBox 13"/>
+          <p:cNvSpPr txBox="1"/>
+          <p:nvPr/>
+        </p:nvSpPr>
+        <p:spPr>
+          <a:xfrm>
+            <a:off x="914400" y="3657600"/>
+            <a:ext cx="5303520" cy="457200"/>
+          </a:xfrm>
+          <a:prstGeom prst="rect">
+            <a:avLst/>
+          </a:prstGeom>
+          <a:noFill/>
+        </p:spPr>
+        <p:txBody>
+          <a:bodyPr wrap="square" lIns="0" rIns="0" tIns="0" bIns="0" anchor="t">
+            <a:spAutoFit/>
+          </a:bodyPr>
+          <a:lstStyle/>
+          <a:p>
+            <a:pPr algn="l"/>
+            <a:r>
+              <a:rPr sz="1200" b="0" i="0">
+                <a:solidFill>
+                  <a:srgbClr val="E8EEF2"/>
+                </a:solidFill>
+                <a:latin typeface="Helvetica Neue"/>
+              </a:rPr>
+              <a:t>✓  Llaves privadas NUNCA dejan el navegador</a:t>
+            </a:r>
+          </a:p>
+        </p:txBody>
+      </p:sp>
+      <p:sp>
+        <p:nvSpPr>
+          <p:cNvPr id="15" name="TextBox 14"/>
+          <p:cNvSpPr txBox="1"/>
+          <p:nvPr/>
+        </p:nvSpPr>
+        <p:spPr>
+          <a:xfrm>
+            <a:off x="914400" y="4160520"/>
+            <a:ext cx="5303520" cy="457200"/>
+          </a:xfrm>
+          <a:prstGeom prst="rect">
+            <a:avLst/>
+          </a:prstGeom>
+          <a:noFill/>
+        </p:spPr>
+        <p:txBody>
+          <a:bodyPr wrap="square" lIns="0" rIns="0" tIns="0" bIns="0" anchor="t">
+            <a:spAutoFit/>
+          </a:bodyPr>
+          <a:lstStyle/>
+          <a:p>
+            <a:pPr algn="l"/>
+            <a:r>
+              <a:rPr sz="1200" b="0" i="0">
+                <a:solidFill>
+                  <a:srgbClr val="E8EEF2"/>
+                </a:solidFill>
+                <a:latin typeface="Helvetica Neue"/>
+              </a:rPr>
+              <a:t>✓  Sin telemetría, sin terceros para datos</a:t>
+            </a:r>
+          </a:p>
+        </p:txBody>
+      </p:sp>
+      <p:sp>
+        <p:nvSpPr>
+          <p:cNvPr id="16" name="Rounded Rectangle 15"/>
           <p:cNvSpPr/>
           <p:nvPr/>
         </p:nvSpPr>
         <p:spPr>
           <a:xfrm>
-            <a:off x="3749039" y="4937760"/>
-            <a:ext cx="1920240" cy="1280160"/>
+            <a:off x="6217920" y="1280160"/>
+            <a:ext cx="5303520" cy="3931920"/>
           </a:xfrm>
           <a:prstGeom prst="roundRect">
             <a:avLst>
@@ -19351,8 +19764,10 @@
           <a:solidFill>
             <a:srgbClr val="1A2129"/>
           </a:solidFill>
-          <a:ln>
-            <a:noFill/>
+          <a:ln w="19050">
+            <a:solidFill>
+              <a:srgbClr val="FF6B6B"/>
+            </a:solidFill>
           </a:ln>
           <a:effectLst/>
         </p:spPr>
@@ -19378,14 +19793,294 @@
       </p:sp>
       <p:sp>
         <p:nvSpPr>
-          <p:cNvPr id="15" name="TextBox 14"/>
-          <p:cNvSpPr txBox="1"/>
-          <p:nvPr/>
-        </p:nvSpPr>
-        <p:spPr>
-          <a:xfrm>
-            <a:off x="3749039" y="5120640"/>
-            <a:ext cx="1920240" cy="640080"/>
+          <p:cNvPr id="17" name="TextBox 16"/>
+          <p:cNvSpPr txBox="1"/>
+          <p:nvPr/>
+        </p:nvSpPr>
+        <p:spPr>
+          <a:xfrm>
+            <a:off x="6492240" y="1508760"/>
+            <a:ext cx="5303520" cy="457200"/>
+          </a:xfrm>
+          <a:prstGeom prst="rect">
+            <a:avLst/>
+          </a:prstGeom>
+          <a:noFill/>
+        </p:spPr>
+        <p:txBody>
+          <a:bodyPr wrap="square" lIns="0" rIns="0" tIns="0" bIns="0" anchor="t">
+            <a:spAutoFit/>
+          </a:bodyPr>
+          <a:lstStyle/>
+          <a:p>
+            <a:pPr algn="l"/>
+            <a:r>
+              <a:rPr sz="1800" b="1" i="0">
+                <a:solidFill>
+                  <a:srgbClr val="FF6B6B"/>
+                </a:solidFill>
+                <a:latin typeface="Helvetica Neue"/>
+              </a:rPr>
+              <a:t>Nuevos riesgos</a:t>
+            </a:r>
+          </a:p>
+        </p:txBody>
+      </p:sp>
+      <p:sp>
+        <p:nvSpPr>
+          <p:cNvPr id="18" name="TextBox 17"/>
+          <p:cNvSpPr txBox="1"/>
+          <p:nvPr/>
+        </p:nvSpPr>
+        <p:spPr>
+          <a:xfrm>
+            <a:off x="6492240" y="2148840"/>
+            <a:ext cx="5303520" cy="457200"/>
+          </a:xfrm>
+          <a:prstGeom prst="rect">
+            <a:avLst/>
+          </a:prstGeom>
+          <a:noFill/>
+        </p:spPr>
+        <p:txBody>
+          <a:bodyPr wrap="square" lIns="0" rIns="0" tIns="0" bIns="0" anchor="t">
+            <a:spAutoFit/>
+          </a:bodyPr>
+          <a:lstStyle/>
+          <a:p>
+            <a:pPr algn="l"/>
+            <a:r>
+              <a:rPr sz="1100" b="0" i="0">
+                <a:solidFill>
+                  <a:srgbClr val="E8EEF2"/>
+                </a:solidFill>
+                <a:latin typeface="Helvetica Neue"/>
+              </a:rPr>
+              <a:t>✗  ADV-3 (supply chain) → mitigado con</a:t>
+            </a:r>
+          </a:p>
+        </p:txBody>
+      </p:sp>
+      <p:sp>
+        <p:nvSpPr>
+          <p:cNvPr id="19" name="TextBox 18"/>
+          <p:cNvSpPr txBox="1"/>
+          <p:nvPr/>
+        </p:nvSpPr>
+        <p:spPr>
+          <a:xfrm>
+            <a:off x="6492240" y="2560320"/>
+            <a:ext cx="5303520" cy="457200"/>
+          </a:xfrm>
+          <a:prstGeom prst="rect">
+            <a:avLst/>
+          </a:prstGeom>
+          <a:noFill/>
+        </p:spPr>
+        <p:txBody>
+          <a:bodyPr wrap="square" lIns="0" rIns="0" tIns="0" bIns="0" anchor="t">
+            <a:spAutoFit/>
+          </a:bodyPr>
+          <a:lstStyle/>
+          <a:p>
+            <a:pPr algn="l"/>
+            <a:r>
+              <a:rPr sz="1100" b="0" i="0">
+                <a:solidFill>
+                  <a:srgbClr val="E8EEF2"/>
+                </a:solidFill>
+                <a:latin typeface="Helvetica Neue"/>
+              </a:rPr>
+              <a:t>    SRI sha384 sobre Pyodide</a:t>
+            </a:r>
+          </a:p>
+        </p:txBody>
+      </p:sp>
+      <p:sp>
+        <p:nvSpPr>
+          <p:cNvPr id="20" name="TextBox 19"/>
+          <p:cNvSpPr txBox="1"/>
+          <p:nvPr/>
+        </p:nvSpPr>
+        <p:spPr>
+          <a:xfrm>
+            <a:off x="6492240" y="2971800"/>
+            <a:ext cx="5303520" cy="457200"/>
+          </a:xfrm>
+          <a:prstGeom prst="rect">
+            <a:avLst/>
+          </a:prstGeom>
+          <a:noFill/>
+        </p:spPr>
+        <p:txBody>
+          <a:bodyPr wrap="square" lIns="0" rIns="0" tIns="0" bIns="0" anchor="t">
+            <a:spAutoFit/>
+          </a:bodyPr>
+          <a:lstStyle/>
+          <a:p>
+            <a:pPr algn="l"/>
+            <a:r>
+              <a:rPr sz="1100" b="0" i="0">
+                <a:solidFill>
+                  <a:srgbClr val="E8EEF2"/>
+                </a:solidFill>
+                <a:latin typeface="Helvetica Neue"/>
+              </a:rPr>
+              <a:t>✗  ADV-6 amplificado: navegador = mas</a:t>
+            </a:r>
+          </a:p>
+        </p:txBody>
+      </p:sp>
+      <p:sp>
+        <p:nvSpPr>
+          <p:cNvPr id="21" name="TextBox 20"/>
+          <p:cNvSpPr txBox="1"/>
+          <p:nvPr/>
+        </p:nvSpPr>
+        <p:spPr>
+          <a:xfrm>
+            <a:off x="6492240" y="3383280"/>
+            <a:ext cx="5303520" cy="457200"/>
+          </a:xfrm>
+          <a:prstGeom prst="rect">
+            <a:avLst/>
+          </a:prstGeom>
+          <a:noFill/>
+        </p:spPr>
+        <p:txBody>
+          <a:bodyPr wrap="square" lIns="0" rIns="0" tIns="0" bIns="0" anchor="t">
+            <a:spAutoFit/>
+          </a:bodyPr>
+          <a:lstStyle/>
+          <a:p>
+            <a:pPr algn="l"/>
+            <a:r>
+              <a:rPr sz="1100" b="0" i="0">
+                <a:solidFill>
+                  <a:srgbClr val="E8EEF2"/>
+                </a:solidFill>
+                <a:latin typeface="Helvetica Neue"/>
+              </a:rPr>
+              <a:t>    superficie. Para secretos sensibles</a:t>
+            </a:r>
+          </a:p>
+        </p:txBody>
+      </p:sp>
+      <p:sp>
+        <p:nvSpPr>
+          <p:cNvPr id="22" name="TextBox 21"/>
+          <p:cNvSpPr txBox="1"/>
+          <p:nvPr/>
+        </p:nvSpPr>
+        <p:spPr>
+          <a:xfrm>
+            <a:off x="6492240" y="3794760"/>
+            <a:ext cx="5303520" cy="457200"/>
+          </a:xfrm>
+          <a:prstGeom prst="rect">
+            <a:avLst/>
+          </a:prstGeom>
+          <a:noFill/>
+        </p:spPr>
+        <p:txBody>
+          <a:bodyPr wrap="square" lIns="0" rIns="0" tIns="0" bIns="0" anchor="t">
+            <a:spAutoFit/>
+          </a:bodyPr>
+          <a:lstStyle/>
+          <a:p>
+            <a:pPr algn="l"/>
+            <a:r>
+              <a:rPr sz="1100" b="0" i="0">
+                <a:solidFill>
+                  <a:srgbClr val="E8EEF2"/>
+                </a:solidFill>
+                <a:latin typeface="Helvetica Neue"/>
+              </a:rPr>
+              <a:t>    se recomienda usar el CLI.</a:t>
+            </a:r>
+          </a:p>
+        </p:txBody>
+      </p:sp>
+      <p:sp>
+        <p:nvSpPr>
+          <p:cNvPr id="23" name="TextBox 22"/>
+          <p:cNvSpPr txBox="1"/>
+          <p:nvPr/>
+        </p:nvSpPr>
+        <p:spPr>
+          <a:xfrm>
+            <a:off x="6492240" y="4206240"/>
+            <a:ext cx="5303520" cy="457200"/>
+          </a:xfrm>
+          <a:prstGeom prst="rect">
+            <a:avLst/>
+          </a:prstGeom>
+          <a:noFill/>
+        </p:spPr>
+        <p:txBody>
+          <a:bodyPr wrap="square" lIns="0" rIns="0" tIns="0" bIns="0" anchor="t">
+            <a:spAutoFit/>
+          </a:bodyPr>
+          <a:lstStyle/>
+          <a:p>
+            <a:pPr algn="l"/>
+            <a:r>
+              <a:rPr sz="1100" b="0" i="0">
+                <a:solidFill>
+                  <a:srgbClr val="E8EEF2"/>
+                </a:solidFill>
+                <a:latin typeface="Helvetica Neue"/>
+              </a:rPr>
+              <a:t>✗  XSS/clickjacking → CSP estricta +</a:t>
+            </a:r>
+          </a:p>
+        </p:txBody>
+      </p:sp>
+      <p:sp>
+        <p:nvSpPr>
+          <p:cNvPr id="24" name="TextBox 23"/>
+          <p:cNvSpPr txBox="1"/>
+          <p:nvPr/>
+        </p:nvSpPr>
+        <p:spPr>
+          <a:xfrm>
+            <a:off x="6492240" y="4617720"/>
+            <a:ext cx="5303520" cy="457200"/>
+          </a:xfrm>
+          <a:prstGeom prst="rect">
+            <a:avLst/>
+          </a:prstGeom>
+          <a:noFill/>
+        </p:spPr>
+        <p:txBody>
+          <a:bodyPr wrap="square" lIns="0" rIns="0" tIns="0" bIns="0" anchor="t">
+            <a:spAutoFit/>
+          </a:bodyPr>
+          <a:lstStyle/>
+          <a:p>
+            <a:pPr algn="l"/>
+            <a:r>
+              <a:rPr sz="1100" b="0" i="0">
+                <a:solidFill>
+                  <a:srgbClr val="E8EEF2"/>
+                </a:solidFill>
+                <a:latin typeface="Helvetica Neue"/>
+              </a:rPr>
+              <a:t>    frame-ancestors 'none'</a:t>
+            </a:r>
+          </a:p>
+        </p:txBody>
+      </p:sp>
+      <p:sp>
+        <p:nvSpPr>
+          <p:cNvPr id="25" name="TextBox 24"/>
+          <p:cNvSpPr txBox="1"/>
+          <p:nvPr/>
+        </p:nvSpPr>
+        <p:spPr>
+          <a:xfrm>
+            <a:off x="457200" y="5486400"/>
+            <a:ext cx="11247120" cy="548640"/>
           </a:xfrm>
           <a:prstGeom prst="rect">
             <a:avLst/>
@@ -19400,311 +20095,13 @@
           <a:p>
             <a:pPr algn="ctr"/>
             <a:r>
-              <a:rPr sz="2800" b="1" i="0">
-                <a:solidFill>
-                  <a:srgbClr val="00E5A8"/>
-                </a:solidFill>
-                <a:latin typeface="Helvetica Neue"/>
-              </a:rPr>
-              <a:t>4</a:t>
-            </a:r>
-          </a:p>
-        </p:txBody>
-      </p:sp>
-      <p:sp>
-        <p:nvSpPr>
-          <p:cNvPr id="16" name="TextBox 15"/>
-          <p:cNvSpPr txBox="1"/>
-          <p:nvPr/>
-        </p:nvSpPr>
-        <p:spPr>
-          <a:xfrm>
-            <a:off x="3749039" y="5760720"/>
-            <a:ext cx="1920240" cy="365760"/>
-          </a:xfrm>
-          <a:prstGeom prst="rect">
-            <a:avLst/>
-          </a:prstGeom>
-          <a:noFill/>
-        </p:spPr>
-        <p:txBody>
-          <a:bodyPr wrap="square" lIns="0" rIns="0" tIns="0" bIns="0" anchor="t">
-            <a:spAutoFit/>
-          </a:bodyPr>
-          <a:lstStyle/>
-          <a:p>
-            <a:pPr algn="ctr"/>
-            <a:r>
-              <a:rPr sz="1000" b="0" i="0">
+              <a:rPr sz="1100" b="0" i="1">
                 <a:solidFill>
                   <a:srgbClr val="8B96A3"/>
                 </a:solidFill>
                 <a:latin typeface="Helvetica Neue"/>
               </a:rPr>
-              <a:t>docs de diseño</a:t>
-            </a:r>
-          </a:p>
-        </p:txBody>
-      </p:sp>
-      <p:sp>
-        <p:nvSpPr>
-          <p:cNvPr id="17" name="Rounded Rectangle 16"/>
-          <p:cNvSpPr/>
-          <p:nvPr/>
-        </p:nvSpPr>
-        <p:spPr>
-          <a:xfrm>
-            <a:off x="6126480" y="4937760"/>
-            <a:ext cx="1920240" cy="1280160"/>
-          </a:xfrm>
-          <a:prstGeom prst="roundRect">
-            <a:avLst>
-              <a:gd name="adj" fmla="val 8000"/>
-            </a:avLst>
-          </a:prstGeom>
-          <a:solidFill>
-            <a:srgbClr val="1A2129"/>
-          </a:solidFill>
-          <a:ln>
-            <a:noFill/>
-          </a:ln>
-          <a:effectLst/>
-        </p:spPr>
-        <p:style>
-          <a:lnRef idx="1">
-            <a:schemeClr val="accent1"/>
-          </a:lnRef>
-          <a:fillRef idx="3">
-            <a:schemeClr val="accent1"/>
-          </a:fillRef>
-          <a:effectRef idx="2">
-            <a:schemeClr val="accent1"/>
-          </a:effectRef>
-          <a:fontRef idx="minor">
-            <a:schemeClr val="lt1"/>
-          </a:fontRef>
-        </p:style>
-        <p:txBody>
-          <a:bodyPr rtlCol="0" anchor="ctr"/>
-          <a:lstStyle/>
-          <a:p/>
-        </p:txBody>
-      </p:sp>
-      <p:sp>
-        <p:nvSpPr>
-          <p:cNvPr id="18" name="TextBox 17"/>
-          <p:cNvSpPr txBox="1"/>
-          <p:nvPr/>
-        </p:nvSpPr>
-        <p:spPr>
-          <a:xfrm>
-            <a:off x="6126480" y="5120640"/>
-            <a:ext cx="1920240" cy="640080"/>
-          </a:xfrm>
-          <a:prstGeom prst="rect">
-            <a:avLst/>
-          </a:prstGeom>
-          <a:noFill/>
-        </p:spPr>
-        <p:txBody>
-          <a:bodyPr wrap="square" lIns="0" rIns="0" tIns="0" bIns="0" anchor="t">
-            <a:spAutoFit/>
-          </a:bodyPr>
-          <a:lstStyle/>
-          <a:p>
-            <a:pPr algn="ctr"/>
-            <a:r>
-              <a:rPr sz="2800" b="1" i="0">
-                <a:solidFill>
-                  <a:srgbClr val="00E5A8"/>
-                </a:solidFill>
-                <a:latin typeface="Helvetica Neue"/>
-              </a:rPr>
-              <a:t>7</a:t>
-            </a:r>
-          </a:p>
-        </p:txBody>
-      </p:sp>
-      <p:sp>
-        <p:nvSpPr>
-          <p:cNvPr id="19" name="TextBox 18"/>
-          <p:cNvSpPr txBox="1"/>
-          <p:nvPr/>
-        </p:nvSpPr>
-        <p:spPr>
-          <a:xfrm>
-            <a:off x="6126480" y="5760720"/>
-            <a:ext cx="1920240" cy="365760"/>
-          </a:xfrm>
-          <a:prstGeom prst="rect">
-            <a:avLst/>
-          </a:prstGeom>
-          <a:noFill/>
-        </p:spPr>
-        <p:txBody>
-          <a:bodyPr wrap="square" lIns="0" rIns="0" tIns="0" bIns="0" anchor="t">
-            <a:spAutoFit/>
-          </a:bodyPr>
-          <a:lstStyle/>
-          <a:p>
-            <a:pPr algn="ctr"/>
-            <a:r>
-              <a:rPr sz="1000" b="0" i="0">
-                <a:solidFill>
-                  <a:srgbClr val="8B96A3"/>
-                </a:solidFill>
-                <a:latin typeface="Helvetica Neue"/>
-              </a:rPr>
-              <a:t>vulns resueltas</a:t>
-            </a:r>
-          </a:p>
-        </p:txBody>
-      </p:sp>
-      <p:sp>
-        <p:nvSpPr>
-          <p:cNvPr id="20" name="Rounded Rectangle 19"/>
-          <p:cNvSpPr/>
-          <p:nvPr/>
-        </p:nvSpPr>
-        <p:spPr>
-          <a:xfrm>
-            <a:off x="8503920" y="4937760"/>
-            <a:ext cx="1920240" cy="1280160"/>
-          </a:xfrm>
-          <a:prstGeom prst="roundRect">
-            <a:avLst>
-              <a:gd name="adj" fmla="val 8000"/>
-            </a:avLst>
-          </a:prstGeom>
-          <a:solidFill>
-            <a:srgbClr val="1A2129"/>
-          </a:solidFill>
-          <a:ln>
-            <a:noFill/>
-          </a:ln>
-          <a:effectLst/>
-        </p:spPr>
-        <p:style>
-          <a:lnRef idx="1">
-            <a:schemeClr val="accent1"/>
-          </a:lnRef>
-          <a:fillRef idx="3">
-            <a:schemeClr val="accent1"/>
-          </a:fillRef>
-          <a:effectRef idx="2">
-            <a:schemeClr val="accent1"/>
-          </a:effectRef>
-          <a:fontRef idx="minor">
-            <a:schemeClr val="lt1"/>
-          </a:fontRef>
-        </p:style>
-        <p:txBody>
-          <a:bodyPr rtlCol="0" anchor="ctr"/>
-          <a:lstStyle/>
-          <a:p/>
-        </p:txBody>
-      </p:sp>
-      <p:sp>
-        <p:nvSpPr>
-          <p:cNvPr id="21" name="TextBox 20"/>
-          <p:cNvSpPr txBox="1"/>
-          <p:nvPr/>
-        </p:nvSpPr>
-        <p:spPr>
-          <a:xfrm>
-            <a:off x="8503920" y="5120640"/>
-            <a:ext cx="1920240" cy="640080"/>
-          </a:xfrm>
-          <a:prstGeom prst="rect">
-            <a:avLst/>
-          </a:prstGeom>
-          <a:noFill/>
-        </p:spPr>
-        <p:txBody>
-          <a:bodyPr wrap="square" lIns="0" rIns="0" tIns="0" bIns="0" anchor="t">
-            <a:spAutoFit/>
-          </a:bodyPr>
-          <a:lstStyle/>
-          <a:p>
-            <a:pPr algn="ctr"/>
-            <a:r>
-              <a:rPr sz="2800" b="1" i="0">
-                <a:solidFill>
-                  <a:srgbClr val="00E5A8"/>
-                </a:solidFill>
-                <a:latin typeface="Helvetica Neue"/>
-              </a:rPr>
-              <a:t>32</a:t>
-            </a:r>
-          </a:p>
-        </p:txBody>
-      </p:sp>
-      <p:sp>
-        <p:nvSpPr>
-          <p:cNvPr id="22" name="TextBox 21"/>
-          <p:cNvSpPr txBox="1"/>
-          <p:nvPr/>
-        </p:nvSpPr>
-        <p:spPr>
-          <a:xfrm>
-            <a:off x="8503920" y="5760720"/>
-            <a:ext cx="1920240" cy="365760"/>
-          </a:xfrm>
-          <a:prstGeom prst="rect">
-            <a:avLst/>
-          </a:prstGeom>
-          <a:noFill/>
-        </p:spPr>
-        <p:txBody>
-          <a:bodyPr wrap="square" lIns="0" rIns="0" tIns="0" bIns="0" anchor="t">
-            <a:spAutoFit/>
-          </a:bodyPr>
-          <a:lstStyle/>
-          <a:p>
-            <a:pPr algn="ctr"/>
-            <a:r>
-              <a:rPr sz="1000" b="0" i="0">
-                <a:solidFill>
-                  <a:srgbClr val="8B96A3"/>
-                </a:solidFill>
-                <a:latin typeface="Helvetica Neue"/>
-              </a:rPr>
-              <a:t>commits</a:t>
-            </a:r>
-          </a:p>
-        </p:txBody>
-      </p:sp>
-      <p:sp>
-        <p:nvSpPr>
-          <p:cNvPr id="23" name="TextBox 22"/>
-          <p:cNvSpPr txBox="1"/>
-          <p:nvPr/>
-        </p:nvSpPr>
-        <p:spPr>
-          <a:xfrm>
-            <a:off x="457200" y="6400800"/>
-            <a:ext cx="11247120" cy="274320"/>
-          </a:xfrm>
-          <a:prstGeom prst="rect">
-            <a:avLst/>
-          </a:prstGeom>
-          <a:noFill/>
-        </p:spPr>
-        <p:txBody>
-          <a:bodyPr wrap="square" lIns="0" rIns="0" tIns="0" bIns="0" anchor="t">
-            <a:spAutoFit/>
-          </a:bodyPr>
-          <a:lstStyle/>
-          <a:p>
-            <a:pPr algn="ctr"/>
-            <a:r>
-              <a:rPr sz="1000" b="0" i="0">
-                <a:solidFill>
-                  <a:srgbClr val="8B96A3"/>
-                </a:solidFill>
-                <a:latin typeface="Menlo"/>
-              </a:rPr>
-              <a:t>github.com/milliyx/Cryptography</a:t>
+              <a:t>Trade-off documentado en web/README.md y docs/D1_Threat_Model.md §6.5</a:t>
             </a:r>
           </a:p>
         </p:txBody>
@@ -19867,760 +20264,64 @@
         </p:nvSpPr>
         <p:spPr>
           <a:xfrm>
-            <a:off x="457200" y="320040"/>
-            <a:ext cx="10972800" cy="548640"/>
-          </a:xfrm>
-          <a:prstGeom prst="rect">
-            <a:avLst/>
-          </a:prstGeom>
-          <a:noFill/>
-        </p:spPr>
-        <p:txBody>
-          <a:bodyPr wrap="square" lIns="0" rIns="0" tIns="0" bIns="0" anchor="t">
-            <a:spAutoFit/>
-          </a:bodyPr>
-          <a:lstStyle/>
-          <a:p>
-            <a:pPr algn="l"/>
-            <a:r>
-              <a:rPr sz="2200" b="1" i="0">
+            <a:off x="731520" y="2560320"/>
+            <a:ext cx="10058400" cy="914400"/>
+          </a:xfrm>
+          <a:prstGeom prst="rect">
+            <a:avLst/>
+          </a:prstGeom>
+          <a:noFill/>
+        </p:spPr>
+        <p:txBody>
+          <a:bodyPr wrap="square" lIns="0" rIns="0" tIns="0" bIns="0" anchor="t">
+            <a:spAutoFit/>
+          </a:bodyPr>
+          <a:lstStyle/>
+          <a:p>
+            <a:pPr algn="l"/>
+            <a:r>
+              <a:rPr sz="1800" b="0" i="1">
+                <a:solidFill>
+                  <a:srgbClr val="8B96A3"/>
+                </a:solidFill>
+                <a:latin typeface="Helvetica Neue"/>
+              </a:rPr>
+              <a:t>Sección 7</a:t>
+            </a:r>
+          </a:p>
+        </p:txBody>
+      </p:sp>
+      <p:sp>
+        <p:nvSpPr>
+          <p:cNvPr id="6" name="TextBox 5"/>
+          <p:cNvSpPr txBox="1"/>
+          <p:nvPr/>
+        </p:nvSpPr>
+        <p:spPr>
+          <a:xfrm>
+            <a:off x="731520" y="3108960"/>
+            <a:ext cx="10515600" cy="1828800"/>
+          </a:xfrm>
+          <a:prstGeom prst="rect">
+            <a:avLst/>
+          </a:prstGeom>
+          <a:noFill/>
+        </p:spPr>
+        <p:txBody>
+          <a:bodyPr wrap="square" lIns="0" rIns="0" tIns="0" bIns="0" anchor="t">
+            <a:spAutoFit/>
+          </a:bodyPr>
+          <a:lstStyle/>
+          <a:p>
+            <a:pPr algn="l"/>
+            <a:r>
+              <a:rPr sz="6000" b="1" i="0">
                 <a:solidFill>
                   <a:srgbClr val="00E5A8"/>
                 </a:solidFill>
                 <a:latin typeface="Helvetica Neue"/>
               </a:rPr>
-              <a:t>Estándares y guías</a:t>
-            </a:r>
-          </a:p>
-        </p:txBody>
-      </p:sp>
-      <p:sp>
-        <p:nvSpPr>
-          <p:cNvPr id="6" name="Rectangle 5"/>
-          <p:cNvSpPr/>
-          <p:nvPr/>
-        </p:nvSpPr>
-        <p:spPr>
-          <a:xfrm>
-            <a:off x="457200" y="960120"/>
-            <a:ext cx="11247120" cy="18288"/>
-          </a:xfrm>
-          <a:prstGeom prst="rect">
-            <a:avLst/>
-          </a:prstGeom>
-          <a:solidFill>
-            <a:srgbClr val="1A2129"/>
-          </a:solidFill>
-          <a:ln>
-            <a:noFill/>
-          </a:ln>
-          <a:effectLst/>
-        </p:spPr>
-        <p:style>
-          <a:lnRef idx="1">
-            <a:schemeClr val="accent1"/>
-          </a:lnRef>
-          <a:fillRef idx="3">
-            <a:schemeClr val="accent1"/>
-          </a:fillRef>
-          <a:effectRef idx="2">
-            <a:schemeClr val="accent1"/>
-          </a:effectRef>
-          <a:fontRef idx="minor">
-            <a:schemeClr val="lt1"/>
-          </a:fontRef>
-        </p:style>
-        <p:txBody>
-          <a:bodyPr rtlCol="0" anchor="ctr"/>
-          <a:lstStyle/>
-          <a:p>
-            <a:pPr algn="ctr"/>
-          </a:p>
-        </p:txBody>
-      </p:sp>
-      <p:sp>
-        <p:nvSpPr>
-          <p:cNvPr id="7" name="TextBox 6"/>
-          <p:cNvSpPr txBox="1"/>
-          <p:nvPr/>
-        </p:nvSpPr>
-        <p:spPr>
-          <a:xfrm>
-            <a:off x="457200" y="6537960"/>
-            <a:ext cx="7315200" cy="274320"/>
-          </a:xfrm>
-          <a:prstGeom prst="rect">
-            <a:avLst/>
-          </a:prstGeom>
-          <a:noFill/>
-        </p:spPr>
-        <p:txBody>
-          <a:bodyPr wrap="square" lIns="0" rIns="0" tIns="0" bIns="0" anchor="t">
-            <a:spAutoFit/>
-          </a:bodyPr>
-          <a:lstStyle/>
-          <a:p>
-            <a:pPr algn="l"/>
-            <a:r>
-              <a:rPr sz="900" b="0" i="1">
-                <a:solidFill>
-                  <a:srgbClr val="8B96A3"/>
-                </a:solidFill>
-                <a:latin typeface="Helvetica Neue"/>
-              </a:rPr>
-              <a:t>Referencias</a:t>
-            </a:r>
-          </a:p>
-        </p:txBody>
-      </p:sp>
-      <p:sp>
-        <p:nvSpPr>
-          <p:cNvPr id="8" name="TextBox 7"/>
-          <p:cNvSpPr txBox="1"/>
-          <p:nvPr/>
-        </p:nvSpPr>
-        <p:spPr>
-          <a:xfrm>
-            <a:off x="10515600" y="6537960"/>
-            <a:ext cx="1371600" cy="274320"/>
-          </a:xfrm>
-          <a:prstGeom prst="rect">
-            <a:avLst/>
-          </a:prstGeom>
-          <a:noFill/>
-        </p:spPr>
-        <p:txBody>
-          <a:bodyPr wrap="square" lIns="0" rIns="0" tIns="0" bIns="0" anchor="t">
-            <a:spAutoFit/>
-          </a:bodyPr>
-          <a:lstStyle/>
-          <a:p>
-            <a:pPr algn="r"/>
-            <a:r>
-              <a:rPr sz="900" b="0" i="0">
-                <a:solidFill>
-                  <a:srgbClr val="8B96A3"/>
-                </a:solidFill>
-                <a:latin typeface="Helvetica Neue"/>
-              </a:rPr>
-              <a:t>33 / 28</a:t>
-            </a:r>
-          </a:p>
-        </p:txBody>
-      </p:sp>
-      <p:sp>
-        <p:nvSpPr>
-          <p:cNvPr id="9" name="Rounded Rectangle 8"/>
-          <p:cNvSpPr/>
-          <p:nvPr/>
-        </p:nvSpPr>
-        <p:spPr>
-          <a:xfrm>
-            <a:off x="640080" y="1280160"/>
-            <a:ext cx="5303520" cy="4572000"/>
-          </a:xfrm>
-          <a:prstGeom prst="roundRect">
-            <a:avLst>
-              <a:gd name="adj" fmla="val 8000"/>
-            </a:avLst>
-          </a:prstGeom>
-          <a:solidFill>
-            <a:srgbClr val="1A2129"/>
-          </a:solidFill>
-          <a:ln w="12700">
-            <a:solidFill>
-              <a:srgbClr val="00E5A8"/>
-            </a:solidFill>
-          </a:ln>
-          <a:effectLst/>
-        </p:spPr>
-        <p:style>
-          <a:lnRef idx="1">
-            <a:schemeClr val="accent1"/>
-          </a:lnRef>
-          <a:fillRef idx="3">
-            <a:schemeClr val="accent1"/>
-          </a:fillRef>
-          <a:effectRef idx="2">
-            <a:schemeClr val="accent1"/>
-          </a:effectRef>
-          <a:fontRef idx="minor">
-            <a:schemeClr val="lt1"/>
-          </a:fontRef>
-        </p:style>
-        <p:txBody>
-          <a:bodyPr rtlCol="0" anchor="ctr"/>
-          <a:lstStyle/>
-          <a:p/>
-        </p:txBody>
-      </p:sp>
-      <p:sp>
-        <p:nvSpPr>
-          <p:cNvPr id="10" name="TextBox 9"/>
-          <p:cNvSpPr txBox="1"/>
-          <p:nvPr/>
-        </p:nvSpPr>
-        <p:spPr>
-          <a:xfrm>
-            <a:off x="914400" y="1508760"/>
-            <a:ext cx="5303520" cy="457200"/>
-          </a:xfrm>
-          <a:prstGeom prst="rect">
-            <a:avLst/>
-          </a:prstGeom>
-          <a:noFill/>
-        </p:spPr>
-        <p:txBody>
-          <a:bodyPr wrap="square" lIns="0" rIns="0" tIns="0" bIns="0" anchor="t">
-            <a:spAutoFit/>
-          </a:bodyPr>
-          <a:lstStyle/>
-          <a:p>
-            <a:pPr algn="l"/>
-            <a:r>
-              <a:rPr sz="1800" b="1" i="0">
-                <a:solidFill>
-                  <a:srgbClr val="00E5A8"/>
-                </a:solidFill>
-                <a:latin typeface="Helvetica Neue"/>
-              </a:rPr>
-              <a:t>Estándares · RFCs</a:t>
-            </a:r>
-          </a:p>
-        </p:txBody>
-      </p:sp>
-      <p:sp>
-        <p:nvSpPr>
-          <p:cNvPr id="11" name="TextBox 10"/>
-          <p:cNvSpPr txBox="1"/>
-          <p:nvPr/>
-        </p:nvSpPr>
-        <p:spPr>
-          <a:xfrm>
-            <a:off x="914400" y="2148840"/>
-            <a:ext cx="5303520" cy="365760"/>
-          </a:xfrm>
-          <a:prstGeom prst="rect">
-            <a:avLst/>
-          </a:prstGeom>
-          <a:noFill/>
-        </p:spPr>
-        <p:txBody>
-          <a:bodyPr wrap="square" lIns="0" rIns="0" tIns="0" bIns="0" anchor="t">
-            <a:spAutoFit/>
-          </a:bodyPr>
-          <a:lstStyle/>
-          <a:p>
-            <a:pPr algn="l"/>
-            <a:r>
-              <a:rPr sz="1200" b="0" i="0">
-                <a:solidFill>
-                  <a:srgbClr val="E8EEF2"/>
-                </a:solidFill>
-                <a:latin typeface="Helvetica Neue"/>
-              </a:rPr>
-              <a:t>● NIST SP 800-38D — GCM</a:t>
-            </a:r>
-          </a:p>
-        </p:txBody>
-      </p:sp>
-      <p:sp>
-        <p:nvSpPr>
-          <p:cNvPr id="12" name="TextBox 11"/>
-          <p:cNvSpPr txBox="1"/>
-          <p:nvPr/>
-        </p:nvSpPr>
-        <p:spPr>
-          <a:xfrm>
-            <a:off x="914400" y="2606040"/>
-            <a:ext cx="5303520" cy="365760"/>
-          </a:xfrm>
-          <a:prstGeom prst="rect">
-            <a:avLst/>
-          </a:prstGeom>
-          <a:noFill/>
-        </p:spPr>
-        <p:txBody>
-          <a:bodyPr wrap="square" lIns="0" rIns="0" tIns="0" bIns="0" anchor="t">
-            <a:spAutoFit/>
-          </a:bodyPr>
-          <a:lstStyle/>
-          <a:p>
-            <a:pPr algn="l"/>
-            <a:r>
-              <a:rPr sz="1200" b="0" i="0">
-                <a:solidFill>
-                  <a:srgbClr val="E8EEF2"/>
-                </a:solidFill>
-                <a:latin typeface="Helvetica Neue"/>
-              </a:rPr>
-              <a:t>● RFC 7539 — ChaCha20 + Poly1305</a:t>
-            </a:r>
-          </a:p>
-        </p:txBody>
-      </p:sp>
-      <p:sp>
-        <p:nvSpPr>
-          <p:cNvPr id="13" name="TextBox 12"/>
-          <p:cNvSpPr txBox="1"/>
-          <p:nvPr/>
-        </p:nvSpPr>
-        <p:spPr>
-          <a:xfrm>
-            <a:off x="914400" y="3063240"/>
-            <a:ext cx="5303520" cy="365760"/>
-          </a:xfrm>
-          <a:prstGeom prst="rect">
-            <a:avLst/>
-          </a:prstGeom>
-          <a:noFill/>
-        </p:spPr>
-        <p:txBody>
-          <a:bodyPr wrap="square" lIns="0" rIns="0" tIns="0" bIns="0" anchor="t">
-            <a:spAutoFit/>
-          </a:bodyPr>
-          <a:lstStyle/>
-          <a:p>
-            <a:pPr algn="l"/>
-            <a:r>
-              <a:rPr sz="1200" b="0" i="0">
-                <a:solidFill>
-                  <a:srgbClr val="E8EEF2"/>
-                </a:solidFill>
-                <a:latin typeface="Helvetica Neue"/>
-              </a:rPr>
-              <a:t>● RFC 7748 — X25519 (Curve25519)</a:t>
-            </a:r>
-          </a:p>
-        </p:txBody>
-      </p:sp>
-      <p:sp>
-        <p:nvSpPr>
-          <p:cNvPr id="14" name="TextBox 13"/>
-          <p:cNvSpPr txBox="1"/>
-          <p:nvPr/>
-        </p:nvSpPr>
-        <p:spPr>
-          <a:xfrm>
-            <a:off x="914400" y="3520440"/>
-            <a:ext cx="5303520" cy="365760"/>
-          </a:xfrm>
-          <a:prstGeom prst="rect">
-            <a:avLst/>
-          </a:prstGeom>
-          <a:noFill/>
-        </p:spPr>
-        <p:txBody>
-          <a:bodyPr wrap="square" lIns="0" rIns="0" tIns="0" bIns="0" anchor="t">
-            <a:spAutoFit/>
-          </a:bodyPr>
-          <a:lstStyle/>
-          <a:p>
-            <a:pPr algn="l"/>
-            <a:r>
-              <a:rPr sz="1200" b="0" i="0">
-                <a:solidFill>
-                  <a:srgbClr val="E8EEF2"/>
-                </a:solidFill>
-                <a:latin typeface="Helvetica Neue"/>
-              </a:rPr>
-              <a:t>● RFC 7914 — scrypt KDF</a:t>
-            </a:r>
-          </a:p>
-        </p:txBody>
-      </p:sp>
-      <p:sp>
-        <p:nvSpPr>
-          <p:cNvPr id="15" name="TextBox 14"/>
-          <p:cNvSpPr txBox="1"/>
-          <p:nvPr/>
-        </p:nvSpPr>
-        <p:spPr>
-          <a:xfrm>
-            <a:off x="914400" y="3977640"/>
-            <a:ext cx="5303520" cy="365760"/>
-          </a:xfrm>
-          <a:prstGeom prst="rect">
-            <a:avLst/>
-          </a:prstGeom>
-          <a:noFill/>
-        </p:spPr>
-        <p:txBody>
-          <a:bodyPr wrap="square" lIns="0" rIns="0" tIns="0" bIns="0" anchor="t">
-            <a:spAutoFit/>
-          </a:bodyPr>
-          <a:lstStyle/>
-          <a:p>
-            <a:pPr algn="l"/>
-            <a:r>
-              <a:rPr sz="1200" b="0" i="0">
-                <a:solidFill>
-                  <a:srgbClr val="E8EEF2"/>
-                </a:solidFill>
-                <a:latin typeface="Helvetica Neue"/>
-              </a:rPr>
-              <a:t>● RFC 8032 — Ed25519 (EdDSA)</a:t>
-            </a:r>
-          </a:p>
-        </p:txBody>
-      </p:sp>
-      <p:sp>
-        <p:nvSpPr>
-          <p:cNvPr id="16" name="TextBox 15"/>
-          <p:cNvSpPr txBox="1"/>
-          <p:nvPr/>
-        </p:nvSpPr>
-        <p:spPr>
-          <a:xfrm>
-            <a:off x="914400" y="4434840"/>
-            <a:ext cx="5303520" cy="365760"/>
-          </a:xfrm>
-          <a:prstGeom prst="rect">
-            <a:avLst/>
-          </a:prstGeom>
-          <a:noFill/>
-        </p:spPr>
-        <p:txBody>
-          <a:bodyPr wrap="square" lIns="0" rIns="0" tIns="0" bIns="0" anchor="t">
-            <a:spAutoFit/>
-          </a:bodyPr>
-          <a:lstStyle/>
-          <a:p>
-            <a:pPr algn="l"/>
-            <a:r>
-              <a:rPr sz="1200" b="0" i="0">
-                <a:solidFill>
-                  <a:srgbClr val="E8EEF2"/>
-                </a:solidFill>
-                <a:latin typeface="Helvetica Neue"/>
-              </a:rPr>
-              <a:t>● RFC 9180 — HPKE</a:t>
-            </a:r>
-          </a:p>
-        </p:txBody>
-      </p:sp>
-      <p:sp>
-        <p:nvSpPr>
-          <p:cNvPr id="17" name="TextBox 16"/>
-          <p:cNvSpPr txBox="1"/>
-          <p:nvPr/>
-        </p:nvSpPr>
-        <p:spPr>
-          <a:xfrm>
-            <a:off x="914400" y="4892040"/>
-            <a:ext cx="5303520" cy="365760"/>
-          </a:xfrm>
-          <a:prstGeom prst="rect">
-            <a:avLst/>
-          </a:prstGeom>
-          <a:noFill/>
-        </p:spPr>
-        <p:txBody>
-          <a:bodyPr wrap="square" lIns="0" rIns="0" tIns="0" bIns="0" anchor="t">
-            <a:spAutoFit/>
-          </a:bodyPr>
-          <a:lstStyle/>
-          <a:p>
-            <a:pPr algn="l"/>
-            <a:r>
-              <a:rPr sz="1200" b="0" i="0">
-                <a:solidFill>
-                  <a:srgbClr val="E8EEF2"/>
-                </a:solidFill>
-                <a:latin typeface="Helvetica Neue"/>
-              </a:rPr>
-              <a:t>● RFC 5869 — HKDF</a:t>
-            </a:r>
-          </a:p>
-        </p:txBody>
-      </p:sp>
-      <p:sp>
-        <p:nvSpPr>
-          <p:cNvPr id="18" name="Rounded Rectangle 17"/>
-          <p:cNvSpPr/>
-          <p:nvPr/>
-        </p:nvSpPr>
-        <p:spPr>
-          <a:xfrm>
-            <a:off x="6217920" y="1280160"/>
-            <a:ext cx="5303520" cy="4572000"/>
-          </a:xfrm>
-          <a:prstGeom prst="roundRect">
-            <a:avLst>
-              <a:gd name="adj" fmla="val 8000"/>
-            </a:avLst>
-          </a:prstGeom>
-          <a:solidFill>
-            <a:srgbClr val="1A2129"/>
-          </a:solidFill>
-          <a:ln w="12700">
-            <a:solidFill>
-              <a:srgbClr val="6C8EFF"/>
-            </a:solidFill>
-          </a:ln>
-          <a:effectLst/>
-        </p:spPr>
-        <p:style>
-          <a:lnRef idx="1">
-            <a:schemeClr val="accent1"/>
-          </a:lnRef>
-          <a:fillRef idx="3">
-            <a:schemeClr val="accent1"/>
-          </a:fillRef>
-          <a:effectRef idx="2">
-            <a:schemeClr val="accent1"/>
-          </a:effectRef>
-          <a:fontRef idx="minor">
-            <a:schemeClr val="lt1"/>
-          </a:fontRef>
-        </p:style>
-        <p:txBody>
-          <a:bodyPr rtlCol="0" anchor="ctr"/>
-          <a:lstStyle/>
-          <a:p/>
-        </p:txBody>
-      </p:sp>
-      <p:sp>
-        <p:nvSpPr>
-          <p:cNvPr id="19" name="TextBox 18"/>
-          <p:cNvSpPr txBox="1"/>
-          <p:nvPr/>
-        </p:nvSpPr>
-        <p:spPr>
-          <a:xfrm>
-            <a:off x="6492240" y="1508760"/>
-            <a:ext cx="5303520" cy="457200"/>
-          </a:xfrm>
-          <a:prstGeom prst="rect">
-            <a:avLst/>
-          </a:prstGeom>
-          <a:noFill/>
-        </p:spPr>
-        <p:txBody>
-          <a:bodyPr wrap="square" lIns="0" rIns="0" tIns="0" bIns="0" anchor="t">
-            <a:spAutoFit/>
-          </a:bodyPr>
-          <a:lstStyle/>
-          <a:p>
-            <a:pPr algn="l"/>
-            <a:r>
-              <a:rPr sz="1800" b="1" i="0">
-                <a:solidFill>
-                  <a:srgbClr val="6C8EFF"/>
-                </a:solidFill>
-                <a:latin typeface="Helvetica Neue"/>
-              </a:rPr>
-              <a:t>Guías · Librerías</a:t>
-            </a:r>
-          </a:p>
-        </p:txBody>
-      </p:sp>
-      <p:sp>
-        <p:nvSpPr>
-          <p:cNvPr id="20" name="TextBox 19"/>
-          <p:cNvSpPr txBox="1"/>
-          <p:nvPr/>
-        </p:nvSpPr>
-        <p:spPr>
-          <a:xfrm>
-            <a:off x="6492240" y="2148840"/>
-            <a:ext cx="5303520" cy="365760"/>
-          </a:xfrm>
-          <a:prstGeom prst="rect">
-            <a:avLst/>
-          </a:prstGeom>
-          <a:noFill/>
-        </p:spPr>
-        <p:txBody>
-          <a:bodyPr wrap="square" lIns="0" rIns="0" tIns="0" bIns="0" anchor="t">
-            <a:spAutoFit/>
-          </a:bodyPr>
-          <a:lstStyle/>
-          <a:p>
-            <a:pPr algn="l"/>
-            <a:r>
-              <a:rPr sz="1200" b="0" i="0">
-                <a:solidFill>
-                  <a:srgbClr val="E8EEF2"/>
-                </a:solidFill>
-                <a:latin typeface="Helvetica Neue"/>
-              </a:rPr>
-              <a:t>● OWASP Password Storage Cheat Sheet</a:t>
-            </a:r>
-          </a:p>
-        </p:txBody>
-      </p:sp>
-      <p:sp>
-        <p:nvSpPr>
-          <p:cNvPr id="21" name="TextBox 20"/>
-          <p:cNvSpPr txBox="1"/>
-          <p:nvPr/>
-        </p:nvSpPr>
-        <p:spPr>
-          <a:xfrm>
-            <a:off x="6492240" y="2606040"/>
-            <a:ext cx="5303520" cy="365760"/>
-          </a:xfrm>
-          <a:prstGeom prst="rect">
-            <a:avLst/>
-          </a:prstGeom>
-          <a:noFill/>
-        </p:spPr>
-        <p:txBody>
-          <a:bodyPr wrap="square" lIns="0" rIns="0" tIns="0" bIns="0" anchor="t">
-            <a:spAutoFit/>
-          </a:bodyPr>
-          <a:lstStyle/>
-          <a:p>
-            <a:pPr algn="l"/>
-            <a:r>
-              <a:rPr sz="1200" b="0" i="0">
-                <a:solidFill>
-                  <a:srgbClr val="E8EEF2"/>
-                </a:solidFill>
-                <a:latin typeface="Helvetica Neue"/>
-              </a:rPr>
-              <a:t>● OWASP Cryptographic Storage</a:t>
-            </a:r>
-          </a:p>
-        </p:txBody>
-      </p:sp>
-      <p:sp>
-        <p:nvSpPr>
-          <p:cNvPr id="22" name="TextBox 21"/>
-          <p:cNvSpPr txBox="1"/>
-          <p:nvPr/>
-        </p:nvSpPr>
-        <p:spPr>
-          <a:xfrm>
-            <a:off x="6492240" y="3063240"/>
-            <a:ext cx="5303520" cy="365760"/>
-          </a:xfrm>
-          <a:prstGeom prst="rect">
-            <a:avLst/>
-          </a:prstGeom>
-          <a:noFill/>
-        </p:spPr>
-        <p:txBody>
-          <a:bodyPr wrap="square" lIns="0" rIns="0" tIns="0" bIns="0" anchor="t">
-            <a:spAutoFit/>
-          </a:bodyPr>
-          <a:lstStyle/>
-          <a:p>
-            <a:pPr algn="l"/>
-            <a:r>
-              <a:rPr sz="1200" b="0" i="0">
-                <a:solidFill>
-                  <a:srgbClr val="E8EEF2"/>
-                </a:solidFill>
-                <a:latin typeface="Helvetica Neue"/>
-              </a:rPr>
-              <a:t>● libsodium / NaCl misuse-resistant</a:t>
-            </a:r>
-          </a:p>
-        </p:txBody>
-      </p:sp>
-      <p:sp>
-        <p:nvSpPr>
-          <p:cNvPr id="23" name="TextBox 22"/>
-          <p:cNvSpPr txBox="1"/>
-          <p:nvPr/>
-        </p:nvSpPr>
-        <p:spPr>
-          <a:xfrm>
-            <a:off x="6492240" y="3520440"/>
-            <a:ext cx="5303520" cy="365760"/>
-          </a:xfrm>
-          <a:prstGeom prst="rect">
-            <a:avLst/>
-          </a:prstGeom>
-          <a:noFill/>
-        </p:spPr>
-        <p:txBody>
-          <a:bodyPr wrap="square" lIns="0" rIns="0" tIns="0" bIns="0" anchor="t">
-            <a:spAutoFit/>
-          </a:bodyPr>
-          <a:lstStyle/>
-          <a:p>
-            <a:pPr algn="l"/>
-            <a:r>
-              <a:rPr sz="1200" b="0" i="0">
-                <a:solidFill>
-                  <a:srgbClr val="E8EEF2"/>
-                </a:solidFill>
-                <a:latin typeface="Helvetica Neue"/>
-              </a:rPr>
-              <a:t>● cryptography (pyca) — primitivas</a:t>
-            </a:r>
-          </a:p>
-        </p:txBody>
-      </p:sp>
-      <p:sp>
-        <p:nvSpPr>
-          <p:cNvPr id="24" name="TextBox 23"/>
-          <p:cNvSpPr txBox="1"/>
-          <p:nvPr/>
-        </p:nvSpPr>
-        <p:spPr>
-          <a:xfrm>
-            <a:off x="6492240" y="3977640"/>
-            <a:ext cx="5303520" cy="365760"/>
-          </a:xfrm>
-          <a:prstGeom prst="rect">
-            <a:avLst/>
-          </a:prstGeom>
-          <a:noFill/>
-        </p:spPr>
-        <p:txBody>
-          <a:bodyPr wrap="square" lIns="0" rIns="0" tIns="0" bIns="0" anchor="t">
-            <a:spAutoFit/>
-          </a:bodyPr>
-          <a:lstStyle/>
-          <a:p>
-            <a:pPr algn="l"/>
-            <a:r>
-              <a:rPr sz="1200" b="0" i="0">
-                <a:solidFill>
-                  <a:srgbClr val="E8EEF2"/>
-                </a:solidFill>
-                <a:latin typeface="Helvetica Neue"/>
-              </a:rPr>
-              <a:t>● hashlib.scrypt — stdlib</a:t>
-            </a:r>
-          </a:p>
-        </p:txBody>
-      </p:sp>
-      <p:sp>
-        <p:nvSpPr>
-          <p:cNvPr id="25" name="TextBox 24"/>
-          <p:cNvSpPr txBox="1"/>
-          <p:nvPr/>
-        </p:nvSpPr>
-        <p:spPr>
-          <a:xfrm>
-            <a:off x="6492240" y="4434840"/>
-            <a:ext cx="5303520" cy="365760"/>
-          </a:xfrm>
-          <a:prstGeom prst="rect">
-            <a:avLst/>
-          </a:prstGeom>
-          <a:noFill/>
-        </p:spPr>
-        <p:txBody>
-          <a:bodyPr wrap="square" lIns="0" rIns="0" tIns="0" bIns="0" anchor="t">
-            <a:spAutoFit/>
-          </a:bodyPr>
-          <a:lstStyle/>
-          <a:p>
-            <a:pPr algn="l"/>
-            <a:r>
-              <a:rPr sz="1200" b="0" i="0">
-                <a:solidFill>
-                  <a:srgbClr val="E8EEF2"/>
-                </a:solidFill>
-                <a:latin typeface="Helvetica Neue"/>
-              </a:rPr>
-              <a:t>● pytest — testing</a:t>
+              <a:t>Final Demo</a:t>
             </a:r>
           </a:p>
         </p:txBody>
@@ -20805,7 +20506,7 @@
                 </a:solidFill>
                 <a:latin typeface="Helvetica Neue"/>
               </a:rPr>
-              <a:t>Q&amp;A</a:t>
+              <a:t>Lo que vamos a mostrar</a:t>
             </a:r>
           </a:p>
         </p:txBody>
@@ -20884,7 +20585,7 @@
                 </a:solidFill>
                 <a:latin typeface="Helvetica Neue"/>
               </a:rPr>
-              <a:t/>
+              <a:t>6 · Final Demo</a:t>
             </a:r>
           </a:p>
         </p:txBody>
@@ -20920,6 +20621,2407 @@
                 <a:latin typeface="Helvetica Neue"/>
               </a:rPr>
               <a:t>34 / 28</a:t>
+            </a:r>
+          </a:p>
+        </p:txBody>
+      </p:sp>
+      <p:sp>
+        <p:nvSpPr>
+          <p:cNvPr id="9" name="TextBox 8"/>
+          <p:cNvSpPr txBox="1"/>
+          <p:nvPr/>
+        </p:nvSpPr>
+        <p:spPr>
+          <a:xfrm>
+            <a:off x="2286000" y="1463040"/>
+            <a:ext cx="8229600" cy="457200"/>
+          </a:xfrm>
+          <a:prstGeom prst="rect">
+            <a:avLst/>
+          </a:prstGeom>
+          <a:noFill/>
+        </p:spPr>
+        <p:txBody>
+          <a:bodyPr wrap="square" lIns="0" rIns="0" tIns="0" bIns="0" anchor="t">
+            <a:spAutoFit/>
+          </a:bodyPr>
+          <a:lstStyle/>
+          <a:p>
+            <a:pPr algn="l"/>
+            <a:r>
+              <a:rPr sz="1800" b="0" i="0">
+                <a:solidFill>
+                  <a:srgbClr val="E8EEF2"/>
+                </a:solidFill>
+                <a:latin typeface="Helvetica Neue"/>
+              </a:rPr>
+              <a:t>1.  Init identidades alice + bob</a:t>
+            </a:r>
+          </a:p>
+        </p:txBody>
+      </p:sp>
+      <p:sp>
+        <p:nvSpPr>
+          <p:cNvPr id="10" name="TextBox 9"/>
+          <p:cNvSpPr txBox="1"/>
+          <p:nvPr/>
+        </p:nvSpPr>
+        <p:spPr>
+          <a:xfrm>
+            <a:off x="2286000" y="1965960"/>
+            <a:ext cx="8229600" cy="457200"/>
+          </a:xfrm>
+          <a:prstGeom prst="rect">
+            <a:avLst/>
+          </a:prstGeom>
+          <a:noFill/>
+        </p:spPr>
+        <p:txBody>
+          <a:bodyPr wrap="square" lIns="0" rIns="0" tIns="0" bIns="0" anchor="t">
+            <a:spAutoFit/>
+          </a:bodyPr>
+          <a:lstStyle/>
+          <a:p>
+            <a:pPr algn="l"/>
+            <a:r>
+              <a:rPr sz="1800" b="0" i="0">
+                <a:solidFill>
+                  <a:srgbClr val="E8EEF2"/>
+                </a:solidFill>
+                <a:latin typeface="Helvetica Neue"/>
+              </a:rPr>
+              <a:t>2.  Alice cifra y firma para Bob</a:t>
+            </a:r>
+          </a:p>
+        </p:txBody>
+      </p:sp>
+      <p:sp>
+        <p:nvSpPr>
+          <p:cNvPr id="11" name="TextBox 10"/>
+          <p:cNvSpPr txBox="1"/>
+          <p:nvPr/>
+        </p:nvSpPr>
+        <p:spPr>
+          <a:xfrm>
+            <a:off x="2286000" y="2468880"/>
+            <a:ext cx="8229600" cy="457200"/>
+          </a:xfrm>
+          <a:prstGeom prst="rect">
+            <a:avLst/>
+          </a:prstGeom>
+          <a:noFill/>
+        </p:spPr>
+        <p:txBody>
+          <a:bodyPr wrap="square" lIns="0" rIns="0" tIns="0" bIns="0" anchor="t">
+            <a:spAutoFit/>
+          </a:bodyPr>
+          <a:lstStyle/>
+          <a:p>
+            <a:pPr algn="l"/>
+            <a:r>
+              <a:rPr sz="1800" b="0" i="0">
+                <a:solidFill>
+                  <a:srgbClr val="E8EEF2"/>
+                </a:solidFill>
+                <a:latin typeface="Helvetica Neue"/>
+              </a:rPr>
+              <a:t>3.  Bob verify + decrypt → plaintext</a:t>
+            </a:r>
+          </a:p>
+        </p:txBody>
+      </p:sp>
+      <p:sp>
+        <p:nvSpPr>
+          <p:cNvPr id="12" name="TextBox 11"/>
+          <p:cNvSpPr txBox="1"/>
+          <p:nvPr/>
+        </p:nvSpPr>
+        <p:spPr>
+          <a:xfrm>
+            <a:off x="2286000" y="2971800"/>
+            <a:ext cx="8229600" cy="457200"/>
+          </a:xfrm>
+          <a:prstGeom prst="rect">
+            <a:avLst/>
+          </a:prstGeom>
+          <a:noFill/>
+        </p:spPr>
+        <p:txBody>
+          <a:bodyPr wrap="square" lIns="0" rIns="0" tIns="0" bIns="0" anchor="t">
+            <a:spAutoFit/>
+          </a:bodyPr>
+          <a:lstStyle/>
+          <a:p>
+            <a:pPr algn="l"/>
+            <a:r>
+              <a:rPr sz="1800" b="0" i="0">
+                <a:solidFill>
+                  <a:srgbClr val="E8EEF2"/>
+                </a:solidFill>
+                <a:latin typeface="Helvetica Neue"/>
+              </a:rPr>
+              <a:t>4.  Password incorrecto → InvalidTag</a:t>
+            </a:r>
+          </a:p>
+        </p:txBody>
+      </p:sp>
+      <p:sp>
+        <p:nvSpPr>
+          <p:cNvPr id="13" name="TextBox 12"/>
+          <p:cNvSpPr txBox="1"/>
+          <p:nvPr/>
+        </p:nvSpPr>
+        <p:spPr>
+          <a:xfrm>
+            <a:off x="2286000" y="3474720"/>
+            <a:ext cx="8229600" cy="457200"/>
+          </a:xfrm>
+          <a:prstGeom prst="rect">
+            <a:avLst/>
+          </a:prstGeom>
+          <a:noFill/>
+        </p:spPr>
+        <p:txBody>
+          <a:bodyPr wrap="square" lIns="0" rIns="0" tIns="0" bIns="0" anchor="t">
+            <a:spAutoFit/>
+          </a:bodyPr>
+          <a:lstStyle/>
+          <a:p>
+            <a:pPr algn="l"/>
+            <a:r>
+              <a:rPr sz="1800" b="0" i="0">
+                <a:solidFill>
+                  <a:srgbClr val="E8EEF2"/>
+                </a:solidFill>
+                <a:latin typeface="Helvetica Neue"/>
+              </a:rPr>
+              <a:t>5.  Contenedor modificado → InvalidSignature</a:t>
+            </a:r>
+          </a:p>
+        </p:txBody>
+      </p:sp>
+      <p:sp>
+        <p:nvSpPr>
+          <p:cNvPr id="14" name="TextBox 13"/>
+          <p:cNvSpPr txBox="1"/>
+          <p:nvPr/>
+        </p:nvSpPr>
+        <p:spPr>
+          <a:xfrm>
+            <a:off x="2286000" y="3977639"/>
+            <a:ext cx="8229600" cy="457200"/>
+          </a:xfrm>
+          <a:prstGeom prst="rect">
+            <a:avLst/>
+          </a:prstGeom>
+          <a:noFill/>
+        </p:spPr>
+        <p:txBody>
+          <a:bodyPr wrap="square" lIns="0" rIns="0" tIns="0" bIns="0" anchor="t">
+            <a:spAutoFit/>
+          </a:bodyPr>
+          <a:lstStyle/>
+          <a:p>
+            <a:pPr algn="l"/>
+            <a:r>
+              <a:rPr sz="1800" b="0" i="0">
+                <a:solidFill>
+                  <a:srgbClr val="E8EEF2"/>
+                </a:solidFill>
+                <a:latin typeface="Helvetica Neue"/>
+              </a:rPr>
+              <a:t>6.  Rotate keys de Alice</a:t>
+            </a:r>
+          </a:p>
+        </p:txBody>
+      </p:sp>
+      <p:sp>
+        <p:nvSpPr>
+          <p:cNvPr id="15" name="TextBox 14"/>
+          <p:cNvSpPr txBox="1"/>
+          <p:nvPr/>
+        </p:nvSpPr>
+        <p:spPr>
+          <a:xfrm>
+            <a:off x="2286000" y="4480560"/>
+            <a:ext cx="8229600" cy="457200"/>
+          </a:xfrm>
+          <a:prstGeom prst="rect">
+            <a:avLst/>
+          </a:prstGeom>
+          <a:noFill/>
+        </p:spPr>
+        <p:txBody>
+          <a:bodyPr wrap="square" lIns="0" rIns="0" tIns="0" bIns="0" anchor="t">
+            <a:spAutoFit/>
+          </a:bodyPr>
+          <a:lstStyle/>
+          <a:p>
+            <a:pPr algn="l"/>
+            <a:r>
+              <a:rPr sz="1800" b="0" i="0">
+                <a:solidFill>
+                  <a:srgbClr val="E8EEF2"/>
+                </a:solidFill>
+                <a:latin typeface="Helvetica Neue"/>
+              </a:rPr>
+              <a:t>7.  Backup → delete → restore</a:t>
+            </a:r>
+          </a:p>
+        </p:txBody>
+      </p:sp>
+      <p:sp>
+        <p:nvSpPr>
+          <p:cNvPr id="16" name="Rounded Rectangle 15"/>
+          <p:cNvSpPr/>
+          <p:nvPr/>
+        </p:nvSpPr>
+        <p:spPr>
+          <a:xfrm>
+            <a:off x="3200400" y="5486400"/>
+            <a:ext cx="5760720" cy="822960"/>
+          </a:xfrm>
+          <a:prstGeom prst="roundRect">
+            <a:avLst>
+              <a:gd name="adj" fmla="val 8000"/>
+            </a:avLst>
+          </a:prstGeom>
+          <a:solidFill>
+            <a:srgbClr val="1A2129"/>
+          </a:solidFill>
+          <a:ln w="12700">
+            <a:solidFill>
+              <a:srgbClr val="00E5A8"/>
+            </a:solidFill>
+          </a:ln>
+          <a:effectLst/>
+        </p:spPr>
+        <p:style>
+          <a:lnRef idx="1">
+            <a:schemeClr val="accent1"/>
+          </a:lnRef>
+          <a:fillRef idx="3">
+            <a:schemeClr val="accent1"/>
+          </a:fillRef>
+          <a:effectRef idx="2">
+            <a:schemeClr val="accent1"/>
+          </a:effectRef>
+          <a:fontRef idx="minor">
+            <a:schemeClr val="lt1"/>
+          </a:fontRef>
+        </p:style>
+        <p:txBody>
+          <a:bodyPr rtlCol="0" anchor="ctr"/>
+          <a:lstStyle/>
+          <a:p/>
+        </p:txBody>
+      </p:sp>
+      <p:sp>
+        <p:nvSpPr>
+          <p:cNvPr id="17" name="TextBox 16"/>
+          <p:cNvSpPr txBox="1"/>
+          <p:nvPr/>
+        </p:nvSpPr>
+        <p:spPr>
+          <a:xfrm>
+            <a:off x="3200400" y="5486400"/>
+            <a:ext cx="5760720" cy="822960"/>
+          </a:xfrm>
+          <a:prstGeom prst="rect">
+            <a:avLst/>
+          </a:prstGeom>
+          <a:noFill/>
+        </p:spPr>
+        <p:txBody>
+          <a:bodyPr wrap="square" lIns="0" rIns="0" tIns="0" bIns="0" anchor="ctr">
+            <a:spAutoFit/>
+          </a:bodyPr>
+          <a:lstStyle/>
+          <a:p>
+            <a:pPr algn="ctr"/>
+            <a:r>
+              <a:rPr sz="1400" b="0" i="0">
+                <a:solidFill>
+                  <a:srgbClr val="00E5A8"/>
+                </a:solidFill>
+                <a:latin typeface="Menlo"/>
+              </a:rPr>
+              <a:t>python demo_d6.py    ·    bash verificar_d6.sh</a:t>
+            </a:r>
+          </a:p>
+        </p:txBody>
+      </p:sp>
+    </p:spTree>
+  </p:cSld>
+  <p:clrMapOvr>
+    <a:masterClrMapping/>
+  </p:clrMapOvr>
+</p:sld>
+</file>
+
+<file path=ppt/slides/slide35.xml><?xml version="1.0" encoding="utf-8"?>
+<p:sld xmlns:a="http://schemas.openxmlformats.org/drawingml/2006/main" xmlns:p="http://schemas.openxmlformats.org/presentationml/2006/main" xmlns:r="http://schemas.openxmlformats.org/officeDocument/2006/relationships">
+  <p:cSld>
+    <p:spTree>
+      <p:nvGrpSpPr>
+        <p:cNvPr id="1" name=""/>
+        <p:cNvGrpSpPr/>
+        <p:nvPr/>
+      </p:nvGrpSpPr>
+      <p:grpSpPr/>
+      <p:sp>
+        <p:nvSpPr>
+          <p:cNvPr id="2" name="Rectangle 1"/>
+          <p:cNvSpPr/>
+          <p:nvPr/>
+        </p:nvSpPr>
+        <p:spPr>
+          <a:xfrm>
+            <a:off x="0" y="0"/>
+            <a:ext cx="12191695" cy="6858000"/>
+          </a:xfrm>
+          <a:prstGeom prst="rect">
+            <a:avLst/>
+          </a:prstGeom>
+          <a:solidFill>
+            <a:srgbClr val="0F1419"/>
+          </a:solidFill>
+          <a:ln>
+            <a:noFill/>
+          </a:ln>
+          <a:effectLst/>
+        </p:spPr>
+        <p:style>
+          <a:lnRef idx="1">
+            <a:schemeClr val="accent1"/>
+          </a:lnRef>
+          <a:fillRef idx="3">
+            <a:schemeClr val="accent1"/>
+          </a:fillRef>
+          <a:effectRef idx="2">
+            <a:schemeClr val="accent1"/>
+          </a:effectRef>
+          <a:fontRef idx="minor">
+            <a:schemeClr val="lt1"/>
+          </a:fontRef>
+        </p:style>
+        <p:txBody>
+          <a:bodyPr rtlCol="0" anchor="ctr"/>
+          <a:lstStyle/>
+          <a:p>
+            <a:pPr algn="ctr"/>
+          </a:p>
+        </p:txBody>
+      </p:sp>
+      <p:sp>
+        <p:nvSpPr>
+          <p:cNvPr id="3" name="Rectangle 2"/>
+          <p:cNvSpPr/>
+          <p:nvPr/>
+        </p:nvSpPr>
+        <p:spPr>
+          <a:xfrm>
+            <a:off x="0" y="0"/>
+            <a:ext cx="12191695" cy="54864"/>
+          </a:xfrm>
+          <a:prstGeom prst="rect">
+            <a:avLst/>
+          </a:prstGeom>
+          <a:solidFill>
+            <a:srgbClr val="1A2129"/>
+          </a:solidFill>
+          <a:ln>
+            <a:noFill/>
+          </a:ln>
+          <a:effectLst/>
+        </p:spPr>
+        <p:style>
+          <a:lnRef idx="1">
+            <a:schemeClr val="accent1"/>
+          </a:lnRef>
+          <a:fillRef idx="3">
+            <a:schemeClr val="accent1"/>
+          </a:fillRef>
+          <a:effectRef idx="2">
+            <a:schemeClr val="accent1"/>
+          </a:effectRef>
+          <a:fontRef idx="minor">
+            <a:schemeClr val="lt1"/>
+          </a:fontRef>
+        </p:style>
+        <p:txBody>
+          <a:bodyPr rtlCol="0" anchor="ctr"/>
+          <a:lstStyle/>
+          <a:p>
+            <a:pPr algn="ctr"/>
+          </a:p>
+        </p:txBody>
+      </p:sp>
+      <p:sp>
+        <p:nvSpPr>
+          <p:cNvPr id="4" name="Rectangle 3"/>
+          <p:cNvSpPr/>
+          <p:nvPr/>
+        </p:nvSpPr>
+        <p:spPr>
+          <a:xfrm>
+            <a:off x="0" y="0"/>
+            <a:ext cx="15239618" cy="54864"/>
+          </a:xfrm>
+          <a:prstGeom prst="rect">
+            <a:avLst/>
+          </a:prstGeom>
+          <a:solidFill>
+            <a:srgbClr val="00E5A8"/>
+          </a:solidFill>
+          <a:ln>
+            <a:noFill/>
+          </a:ln>
+          <a:effectLst/>
+        </p:spPr>
+        <p:style>
+          <a:lnRef idx="1">
+            <a:schemeClr val="accent1"/>
+          </a:lnRef>
+          <a:fillRef idx="3">
+            <a:schemeClr val="accent1"/>
+          </a:fillRef>
+          <a:effectRef idx="2">
+            <a:schemeClr val="accent1"/>
+          </a:effectRef>
+          <a:fontRef idx="minor">
+            <a:schemeClr val="lt1"/>
+          </a:fontRef>
+        </p:style>
+        <p:txBody>
+          <a:bodyPr rtlCol="0" anchor="ctr"/>
+          <a:lstStyle/>
+          <a:p>
+            <a:pPr algn="ctr"/>
+          </a:p>
+        </p:txBody>
+      </p:sp>
+      <p:sp>
+        <p:nvSpPr>
+          <p:cNvPr id="5" name="TextBox 4"/>
+          <p:cNvSpPr txBox="1"/>
+          <p:nvPr/>
+        </p:nvSpPr>
+        <p:spPr>
+          <a:xfrm>
+            <a:off x="457200" y="320040"/>
+            <a:ext cx="10972800" cy="548640"/>
+          </a:xfrm>
+          <a:prstGeom prst="rect">
+            <a:avLst/>
+          </a:prstGeom>
+          <a:noFill/>
+        </p:spPr>
+        <p:txBody>
+          <a:bodyPr wrap="square" lIns="0" rIns="0" tIns="0" bIns="0" anchor="t">
+            <a:spAutoFit/>
+          </a:bodyPr>
+          <a:lstStyle/>
+          <a:p>
+            <a:pPr algn="l"/>
+            <a:r>
+              <a:rPr sz="2200" b="1" i="0">
+                <a:solidFill>
+                  <a:srgbClr val="00E5A8"/>
+                </a:solidFill>
+                <a:latin typeface="Helvetica Neue"/>
+              </a:rPr>
+              <a:t>Estado final</a:t>
+            </a:r>
+          </a:p>
+        </p:txBody>
+      </p:sp>
+      <p:sp>
+        <p:nvSpPr>
+          <p:cNvPr id="6" name="Rectangle 5"/>
+          <p:cNvSpPr/>
+          <p:nvPr/>
+        </p:nvSpPr>
+        <p:spPr>
+          <a:xfrm>
+            <a:off x="457200" y="960120"/>
+            <a:ext cx="11247120" cy="18288"/>
+          </a:xfrm>
+          <a:prstGeom prst="rect">
+            <a:avLst/>
+          </a:prstGeom>
+          <a:solidFill>
+            <a:srgbClr val="1A2129"/>
+          </a:solidFill>
+          <a:ln>
+            <a:noFill/>
+          </a:ln>
+          <a:effectLst/>
+        </p:spPr>
+        <p:style>
+          <a:lnRef idx="1">
+            <a:schemeClr val="accent1"/>
+          </a:lnRef>
+          <a:fillRef idx="3">
+            <a:schemeClr val="accent1"/>
+          </a:fillRef>
+          <a:effectRef idx="2">
+            <a:schemeClr val="accent1"/>
+          </a:effectRef>
+          <a:fontRef idx="minor">
+            <a:schemeClr val="lt1"/>
+          </a:fontRef>
+        </p:style>
+        <p:txBody>
+          <a:bodyPr rtlCol="0" anchor="ctr"/>
+          <a:lstStyle/>
+          <a:p>
+            <a:pPr algn="ctr"/>
+          </a:p>
+        </p:txBody>
+      </p:sp>
+      <p:sp>
+        <p:nvSpPr>
+          <p:cNvPr id="7" name="TextBox 6"/>
+          <p:cNvSpPr txBox="1"/>
+          <p:nvPr/>
+        </p:nvSpPr>
+        <p:spPr>
+          <a:xfrm>
+            <a:off x="457200" y="6537960"/>
+            <a:ext cx="7315200" cy="274320"/>
+          </a:xfrm>
+          <a:prstGeom prst="rect">
+            <a:avLst/>
+          </a:prstGeom>
+          <a:noFill/>
+        </p:spPr>
+        <p:txBody>
+          <a:bodyPr wrap="square" lIns="0" rIns="0" tIns="0" bIns="0" anchor="t">
+            <a:spAutoFit/>
+          </a:bodyPr>
+          <a:lstStyle/>
+          <a:p>
+            <a:pPr algn="l"/>
+            <a:r>
+              <a:rPr sz="900" b="0" i="1">
+                <a:solidFill>
+                  <a:srgbClr val="8B96A3"/>
+                </a:solidFill>
+                <a:latin typeface="Helvetica Neue"/>
+              </a:rPr>
+              <a:t>6 · Final Demo</a:t>
+            </a:r>
+          </a:p>
+        </p:txBody>
+      </p:sp>
+      <p:sp>
+        <p:nvSpPr>
+          <p:cNvPr id="8" name="TextBox 7"/>
+          <p:cNvSpPr txBox="1"/>
+          <p:nvPr/>
+        </p:nvSpPr>
+        <p:spPr>
+          <a:xfrm>
+            <a:off x="10515600" y="6537960"/>
+            <a:ext cx="1371600" cy="274320"/>
+          </a:xfrm>
+          <a:prstGeom prst="rect">
+            <a:avLst/>
+          </a:prstGeom>
+          <a:noFill/>
+        </p:spPr>
+        <p:txBody>
+          <a:bodyPr wrap="square" lIns="0" rIns="0" tIns="0" bIns="0" anchor="t">
+            <a:spAutoFit/>
+          </a:bodyPr>
+          <a:lstStyle/>
+          <a:p>
+            <a:pPr algn="r"/>
+            <a:r>
+              <a:rPr sz="900" b="0" i="0">
+                <a:solidFill>
+                  <a:srgbClr val="8B96A3"/>
+                </a:solidFill>
+                <a:latin typeface="Helvetica Neue"/>
+              </a:rPr>
+              <a:t>35 / 28</a:t>
+            </a:r>
+          </a:p>
+        </p:txBody>
+      </p:sp>
+      <p:sp>
+        <p:nvSpPr>
+          <p:cNvPr id="9" name="TextBox 8"/>
+          <p:cNvSpPr txBox="1"/>
+          <p:nvPr/>
+        </p:nvSpPr>
+        <p:spPr>
+          <a:xfrm>
+            <a:off x="457200" y="1280160"/>
+            <a:ext cx="11247120" cy="2286000"/>
+          </a:xfrm>
+          <a:prstGeom prst="rect">
+            <a:avLst/>
+          </a:prstGeom>
+          <a:noFill/>
+        </p:spPr>
+        <p:txBody>
+          <a:bodyPr wrap="square" lIns="0" rIns="0" tIns="0" bIns="0" anchor="t">
+            <a:spAutoFit/>
+          </a:bodyPr>
+          <a:lstStyle/>
+          <a:p>
+            <a:pPr algn="ctr"/>
+            <a:r>
+              <a:rPr sz="12000" b="1" i="0">
+                <a:solidFill>
+                  <a:srgbClr val="00E5A8"/>
+                </a:solidFill>
+                <a:latin typeface="Helvetica Neue"/>
+              </a:rPr>
+              <a:t>300 / 300</a:t>
+            </a:r>
+          </a:p>
+        </p:txBody>
+      </p:sp>
+      <p:sp>
+        <p:nvSpPr>
+          <p:cNvPr id="10" name="TextBox 9"/>
+          <p:cNvSpPr txBox="1"/>
+          <p:nvPr/>
+        </p:nvSpPr>
+        <p:spPr>
+          <a:xfrm>
+            <a:off x="457200" y="4023360"/>
+            <a:ext cx="11247120" cy="457200"/>
+          </a:xfrm>
+          <a:prstGeom prst="rect">
+            <a:avLst/>
+          </a:prstGeom>
+          <a:noFill/>
+        </p:spPr>
+        <p:txBody>
+          <a:bodyPr wrap="square" lIns="0" rIns="0" tIns="0" bIns="0" anchor="t">
+            <a:spAutoFit/>
+          </a:bodyPr>
+          <a:lstStyle/>
+          <a:p>
+            <a:pPr algn="ctr"/>
+            <a:r>
+              <a:rPr sz="1800" b="0" i="0">
+                <a:solidFill>
+                  <a:srgbClr val="8B96A3"/>
+                </a:solidFill>
+                <a:latin typeface="Helvetica Neue"/>
+              </a:rPr>
+              <a:t>tests verdes</a:t>
+            </a:r>
+          </a:p>
+        </p:txBody>
+      </p:sp>
+      <p:sp>
+        <p:nvSpPr>
+          <p:cNvPr id="11" name="Rounded Rectangle 10"/>
+          <p:cNvSpPr/>
+          <p:nvPr/>
+        </p:nvSpPr>
+        <p:spPr>
+          <a:xfrm>
+            <a:off x="1371600" y="4937760"/>
+            <a:ext cx="1920240" cy="1280160"/>
+          </a:xfrm>
+          <a:prstGeom prst="roundRect">
+            <a:avLst>
+              <a:gd name="adj" fmla="val 8000"/>
+            </a:avLst>
+          </a:prstGeom>
+          <a:solidFill>
+            <a:srgbClr val="1A2129"/>
+          </a:solidFill>
+          <a:ln>
+            <a:noFill/>
+          </a:ln>
+          <a:effectLst/>
+        </p:spPr>
+        <p:style>
+          <a:lnRef idx="1">
+            <a:schemeClr val="accent1"/>
+          </a:lnRef>
+          <a:fillRef idx="3">
+            <a:schemeClr val="accent1"/>
+          </a:fillRef>
+          <a:effectRef idx="2">
+            <a:schemeClr val="accent1"/>
+          </a:effectRef>
+          <a:fontRef idx="minor">
+            <a:schemeClr val="lt1"/>
+          </a:fontRef>
+        </p:style>
+        <p:txBody>
+          <a:bodyPr rtlCol="0" anchor="ctr"/>
+          <a:lstStyle/>
+          <a:p/>
+        </p:txBody>
+      </p:sp>
+      <p:sp>
+        <p:nvSpPr>
+          <p:cNvPr id="12" name="TextBox 11"/>
+          <p:cNvSpPr txBox="1"/>
+          <p:nvPr/>
+        </p:nvSpPr>
+        <p:spPr>
+          <a:xfrm>
+            <a:off x="1371600" y="5120640"/>
+            <a:ext cx="1920240" cy="640080"/>
+          </a:xfrm>
+          <a:prstGeom prst="rect">
+            <a:avLst/>
+          </a:prstGeom>
+          <a:noFill/>
+        </p:spPr>
+        <p:txBody>
+          <a:bodyPr wrap="square" lIns="0" rIns="0" tIns="0" bIns="0" anchor="t">
+            <a:spAutoFit/>
+          </a:bodyPr>
+          <a:lstStyle/>
+          <a:p>
+            <a:pPr algn="ctr"/>
+            <a:r>
+              <a:rPr sz="2800" b="1" i="0">
+                <a:solidFill>
+                  <a:srgbClr val="00E5A8"/>
+                </a:solidFill>
+                <a:latin typeface="Helvetica Neue"/>
+              </a:rPr>
+              <a:t>4500</a:t>
+            </a:r>
+          </a:p>
+        </p:txBody>
+      </p:sp>
+      <p:sp>
+        <p:nvSpPr>
+          <p:cNvPr id="13" name="TextBox 12"/>
+          <p:cNvSpPr txBox="1"/>
+          <p:nvPr/>
+        </p:nvSpPr>
+        <p:spPr>
+          <a:xfrm>
+            <a:off x="1371600" y="5760720"/>
+            <a:ext cx="1920240" cy="365760"/>
+          </a:xfrm>
+          <a:prstGeom prst="rect">
+            <a:avLst/>
+          </a:prstGeom>
+          <a:noFill/>
+        </p:spPr>
+        <p:txBody>
+          <a:bodyPr wrap="square" lIns="0" rIns="0" tIns="0" bIns="0" anchor="t">
+            <a:spAutoFit/>
+          </a:bodyPr>
+          <a:lstStyle/>
+          <a:p>
+            <a:pPr algn="ctr"/>
+            <a:r>
+              <a:rPr sz="1000" b="0" i="0">
+                <a:solidFill>
+                  <a:srgbClr val="8B96A3"/>
+                </a:solidFill>
+                <a:latin typeface="Helvetica Neue"/>
+              </a:rPr>
+              <a:t>líneas Python</a:t>
+            </a:r>
+          </a:p>
+        </p:txBody>
+      </p:sp>
+      <p:sp>
+        <p:nvSpPr>
+          <p:cNvPr id="14" name="Rounded Rectangle 13"/>
+          <p:cNvSpPr/>
+          <p:nvPr/>
+        </p:nvSpPr>
+        <p:spPr>
+          <a:xfrm>
+            <a:off x="3749039" y="4937760"/>
+            <a:ext cx="1920240" cy="1280160"/>
+          </a:xfrm>
+          <a:prstGeom prst="roundRect">
+            <a:avLst>
+              <a:gd name="adj" fmla="val 8000"/>
+            </a:avLst>
+          </a:prstGeom>
+          <a:solidFill>
+            <a:srgbClr val="1A2129"/>
+          </a:solidFill>
+          <a:ln>
+            <a:noFill/>
+          </a:ln>
+          <a:effectLst/>
+        </p:spPr>
+        <p:style>
+          <a:lnRef idx="1">
+            <a:schemeClr val="accent1"/>
+          </a:lnRef>
+          <a:fillRef idx="3">
+            <a:schemeClr val="accent1"/>
+          </a:fillRef>
+          <a:effectRef idx="2">
+            <a:schemeClr val="accent1"/>
+          </a:effectRef>
+          <a:fontRef idx="minor">
+            <a:schemeClr val="lt1"/>
+          </a:fontRef>
+        </p:style>
+        <p:txBody>
+          <a:bodyPr rtlCol="0" anchor="ctr"/>
+          <a:lstStyle/>
+          <a:p/>
+        </p:txBody>
+      </p:sp>
+      <p:sp>
+        <p:nvSpPr>
+          <p:cNvPr id="15" name="TextBox 14"/>
+          <p:cNvSpPr txBox="1"/>
+          <p:nvPr/>
+        </p:nvSpPr>
+        <p:spPr>
+          <a:xfrm>
+            <a:off x="3749039" y="5120640"/>
+            <a:ext cx="1920240" cy="640080"/>
+          </a:xfrm>
+          <a:prstGeom prst="rect">
+            <a:avLst/>
+          </a:prstGeom>
+          <a:noFill/>
+        </p:spPr>
+        <p:txBody>
+          <a:bodyPr wrap="square" lIns="0" rIns="0" tIns="0" bIns="0" anchor="t">
+            <a:spAutoFit/>
+          </a:bodyPr>
+          <a:lstStyle/>
+          <a:p>
+            <a:pPr algn="ctr"/>
+            <a:r>
+              <a:rPr sz="2800" b="1" i="0">
+                <a:solidFill>
+                  <a:srgbClr val="00E5A8"/>
+                </a:solidFill>
+                <a:latin typeface="Helvetica Neue"/>
+              </a:rPr>
+              <a:t>4</a:t>
+            </a:r>
+          </a:p>
+        </p:txBody>
+      </p:sp>
+      <p:sp>
+        <p:nvSpPr>
+          <p:cNvPr id="16" name="TextBox 15"/>
+          <p:cNvSpPr txBox="1"/>
+          <p:nvPr/>
+        </p:nvSpPr>
+        <p:spPr>
+          <a:xfrm>
+            <a:off x="3749039" y="5760720"/>
+            <a:ext cx="1920240" cy="365760"/>
+          </a:xfrm>
+          <a:prstGeom prst="rect">
+            <a:avLst/>
+          </a:prstGeom>
+          <a:noFill/>
+        </p:spPr>
+        <p:txBody>
+          <a:bodyPr wrap="square" lIns="0" rIns="0" tIns="0" bIns="0" anchor="t">
+            <a:spAutoFit/>
+          </a:bodyPr>
+          <a:lstStyle/>
+          <a:p>
+            <a:pPr algn="ctr"/>
+            <a:r>
+              <a:rPr sz="1000" b="0" i="0">
+                <a:solidFill>
+                  <a:srgbClr val="8B96A3"/>
+                </a:solidFill>
+                <a:latin typeface="Helvetica Neue"/>
+              </a:rPr>
+              <a:t>docs de diseño</a:t>
+            </a:r>
+          </a:p>
+        </p:txBody>
+      </p:sp>
+      <p:sp>
+        <p:nvSpPr>
+          <p:cNvPr id="17" name="Rounded Rectangle 16"/>
+          <p:cNvSpPr/>
+          <p:nvPr/>
+        </p:nvSpPr>
+        <p:spPr>
+          <a:xfrm>
+            <a:off x="6126480" y="4937760"/>
+            <a:ext cx="1920240" cy="1280160"/>
+          </a:xfrm>
+          <a:prstGeom prst="roundRect">
+            <a:avLst>
+              <a:gd name="adj" fmla="val 8000"/>
+            </a:avLst>
+          </a:prstGeom>
+          <a:solidFill>
+            <a:srgbClr val="1A2129"/>
+          </a:solidFill>
+          <a:ln>
+            <a:noFill/>
+          </a:ln>
+          <a:effectLst/>
+        </p:spPr>
+        <p:style>
+          <a:lnRef idx="1">
+            <a:schemeClr val="accent1"/>
+          </a:lnRef>
+          <a:fillRef idx="3">
+            <a:schemeClr val="accent1"/>
+          </a:fillRef>
+          <a:effectRef idx="2">
+            <a:schemeClr val="accent1"/>
+          </a:effectRef>
+          <a:fontRef idx="minor">
+            <a:schemeClr val="lt1"/>
+          </a:fontRef>
+        </p:style>
+        <p:txBody>
+          <a:bodyPr rtlCol="0" anchor="ctr"/>
+          <a:lstStyle/>
+          <a:p/>
+        </p:txBody>
+      </p:sp>
+      <p:sp>
+        <p:nvSpPr>
+          <p:cNvPr id="18" name="TextBox 17"/>
+          <p:cNvSpPr txBox="1"/>
+          <p:nvPr/>
+        </p:nvSpPr>
+        <p:spPr>
+          <a:xfrm>
+            <a:off x="6126480" y="5120640"/>
+            <a:ext cx="1920240" cy="640080"/>
+          </a:xfrm>
+          <a:prstGeom prst="rect">
+            <a:avLst/>
+          </a:prstGeom>
+          <a:noFill/>
+        </p:spPr>
+        <p:txBody>
+          <a:bodyPr wrap="square" lIns="0" rIns="0" tIns="0" bIns="0" anchor="t">
+            <a:spAutoFit/>
+          </a:bodyPr>
+          <a:lstStyle/>
+          <a:p>
+            <a:pPr algn="ctr"/>
+            <a:r>
+              <a:rPr sz="2800" b="1" i="0">
+                <a:solidFill>
+                  <a:srgbClr val="00E5A8"/>
+                </a:solidFill>
+                <a:latin typeface="Helvetica Neue"/>
+              </a:rPr>
+              <a:t>7</a:t>
+            </a:r>
+          </a:p>
+        </p:txBody>
+      </p:sp>
+      <p:sp>
+        <p:nvSpPr>
+          <p:cNvPr id="19" name="TextBox 18"/>
+          <p:cNvSpPr txBox="1"/>
+          <p:nvPr/>
+        </p:nvSpPr>
+        <p:spPr>
+          <a:xfrm>
+            <a:off x="6126480" y="5760720"/>
+            <a:ext cx="1920240" cy="365760"/>
+          </a:xfrm>
+          <a:prstGeom prst="rect">
+            <a:avLst/>
+          </a:prstGeom>
+          <a:noFill/>
+        </p:spPr>
+        <p:txBody>
+          <a:bodyPr wrap="square" lIns="0" rIns="0" tIns="0" bIns="0" anchor="t">
+            <a:spAutoFit/>
+          </a:bodyPr>
+          <a:lstStyle/>
+          <a:p>
+            <a:pPr algn="ctr"/>
+            <a:r>
+              <a:rPr sz="1000" b="0" i="0">
+                <a:solidFill>
+                  <a:srgbClr val="8B96A3"/>
+                </a:solidFill>
+                <a:latin typeface="Helvetica Neue"/>
+              </a:rPr>
+              <a:t>vulns resueltas</a:t>
+            </a:r>
+          </a:p>
+        </p:txBody>
+      </p:sp>
+      <p:sp>
+        <p:nvSpPr>
+          <p:cNvPr id="20" name="Rounded Rectangle 19"/>
+          <p:cNvSpPr/>
+          <p:nvPr/>
+        </p:nvSpPr>
+        <p:spPr>
+          <a:xfrm>
+            <a:off x="8503920" y="4937760"/>
+            <a:ext cx="1920240" cy="1280160"/>
+          </a:xfrm>
+          <a:prstGeom prst="roundRect">
+            <a:avLst>
+              <a:gd name="adj" fmla="val 8000"/>
+            </a:avLst>
+          </a:prstGeom>
+          <a:solidFill>
+            <a:srgbClr val="1A2129"/>
+          </a:solidFill>
+          <a:ln>
+            <a:noFill/>
+          </a:ln>
+          <a:effectLst/>
+        </p:spPr>
+        <p:style>
+          <a:lnRef idx="1">
+            <a:schemeClr val="accent1"/>
+          </a:lnRef>
+          <a:fillRef idx="3">
+            <a:schemeClr val="accent1"/>
+          </a:fillRef>
+          <a:effectRef idx="2">
+            <a:schemeClr val="accent1"/>
+          </a:effectRef>
+          <a:fontRef idx="minor">
+            <a:schemeClr val="lt1"/>
+          </a:fontRef>
+        </p:style>
+        <p:txBody>
+          <a:bodyPr rtlCol="0" anchor="ctr"/>
+          <a:lstStyle/>
+          <a:p/>
+        </p:txBody>
+      </p:sp>
+      <p:sp>
+        <p:nvSpPr>
+          <p:cNvPr id="21" name="TextBox 20"/>
+          <p:cNvSpPr txBox="1"/>
+          <p:nvPr/>
+        </p:nvSpPr>
+        <p:spPr>
+          <a:xfrm>
+            <a:off x="8503920" y="5120640"/>
+            <a:ext cx="1920240" cy="640080"/>
+          </a:xfrm>
+          <a:prstGeom prst="rect">
+            <a:avLst/>
+          </a:prstGeom>
+          <a:noFill/>
+        </p:spPr>
+        <p:txBody>
+          <a:bodyPr wrap="square" lIns="0" rIns="0" tIns="0" bIns="0" anchor="t">
+            <a:spAutoFit/>
+          </a:bodyPr>
+          <a:lstStyle/>
+          <a:p>
+            <a:pPr algn="ctr"/>
+            <a:r>
+              <a:rPr sz="2800" b="1" i="0">
+                <a:solidFill>
+                  <a:srgbClr val="00E5A8"/>
+                </a:solidFill>
+                <a:latin typeface="Helvetica Neue"/>
+              </a:rPr>
+              <a:t>32</a:t>
+            </a:r>
+          </a:p>
+        </p:txBody>
+      </p:sp>
+      <p:sp>
+        <p:nvSpPr>
+          <p:cNvPr id="22" name="TextBox 21"/>
+          <p:cNvSpPr txBox="1"/>
+          <p:nvPr/>
+        </p:nvSpPr>
+        <p:spPr>
+          <a:xfrm>
+            <a:off x="8503920" y="5760720"/>
+            <a:ext cx="1920240" cy="365760"/>
+          </a:xfrm>
+          <a:prstGeom prst="rect">
+            <a:avLst/>
+          </a:prstGeom>
+          <a:noFill/>
+        </p:spPr>
+        <p:txBody>
+          <a:bodyPr wrap="square" lIns="0" rIns="0" tIns="0" bIns="0" anchor="t">
+            <a:spAutoFit/>
+          </a:bodyPr>
+          <a:lstStyle/>
+          <a:p>
+            <a:pPr algn="ctr"/>
+            <a:r>
+              <a:rPr sz="1000" b="0" i="0">
+                <a:solidFill>
+                  <a:srgbClr val="8B96A3"/>
+                </a:solidFill>
+                <a:latin typeface="Helvetica Neue"/>
+              </a:rPr>
+              <a:t>commits</a:t>
+            </a:r>
+          </a:p>
+        </p:txBody>
+      </p:sp>
+      <p:sp>
+        <p:nvSpPr>
+          <p:cNvPr id="23" name="TextBox 22"/>
+          <p:cNvSpPr txBox="1"/>
+          <p:nvPr/>
+        </p:nvSpPr>
+        <p:spPr>
+          <a:xfrm>
+            <a:off x="457200" y="6400800"/>
+            <a:ext cx="11247120" cy="274320"/>
+          </a:xfrm>
+          <a:prstGeom prst="rect">
+            <a:avLst/>
+          </a:prstGeom>
+          <a:noFill/>
+        </p:spPr>
+        <p:txBody>
+          <a:bodyPr wrap="square" lIns="0" rIns="0" tIns="0" bIns="0" anchor="t">
+            <a:spAutoFit/>
+          </a:bodyPr>
+          <a:lstStyle/>
+          <a:p>
+            <a:pPr algn="ctr"/>
+            <a:r>
+              <a:rPr sz="1000" b="0" i="0">
+                <a:solidFill>
+                  <a:srgbClr val="8B96A3"/>
+                </a:solidFill>
+                <a:latin typeface="Menlo"/>
+              </a:rPr>
+              <a:t>github.com/milliyx/Cryptography</a:t>
+            </a:r>
+          </a:p>
+        </p:txBody>
+      </p:sp>
+    </p:spTree>
+  </p:cSld>
+  <p:clrMapOvr>
+    <a:masterClrMapping/>
+  </p:clrMapOvr>
+</p:sld>
+</file>
+
+<file path=ppt/slides/slide36.xml><?xml version="1.0" encoding="utf-8"?>
+<p:sld xmlns:a="http://schemas.openxmlformats.org/drawingml/2006/main" xmlns:p="http://schemas.openxmlformats.org/presentationml/2006/main" xmlns:r="http://schemas.openxmlformats.org/officeDocument/2006/relationships">
+  <p:cSld>
+    <p:spTree>
+      <p:nvGrpSpPr>
+        <p:cNvPr id="1" name=""/>
+        <p:cNvGrpSpPr/>
+        <p:nvPr/>
+      </p:nvGrpSpPr>
+      <p:grpSpPr/>
+      <p:sp>
+        <p:nvSpPr>
+          <p:cNvPr id="2" name="Rectangle 1"/>
+          <p:cNvSpPr/>
+          <p:nvPr/>
+        </p:nvSpPr>
+        <p:spPr>
+          <a:xfrm>
+            <a:off x="0" y="0"/>
+            <a:ext cx="12191695" cy="6858000"/>
+          </a:xfrm>
+          <a:prstGeom prst="rect">
+            <a:avLst/>
+          </a:prstGeom>
+          <a:solidFill>
+            <a:srgbClr val="0F1419"/>
+          </a:solidFill>
+          <a:ln>
+            <a:noFill/>
+          </a:ln>
+          <a:effectLst/>
+        </p:spPr>
+        <p:style>
+          <a:lnRef idx="1">
+            <a:schemeClr val="accent1"/>
+          </a:lnRef>
+          <a:fillRef idx="3">
+            <a:schemeClr val="accent1"/>
+          </a:fillRef>
+          <a:effectRef idx="2">
+            <a:schemeClr val="accent1"/>
+          </a:effectRef>
+          <a:fontRef idx="minor">
+            <a:schemeClr val="lt1"/>
+          </a:fontRef>
+        </p:style>
+        <p:txBody>
+          <a:bodyPr rtlCol="0" anchor="ctr"/>
+          <a:lstStyle/>
+          <a:p>
+            <a:pPr algn="ctr"/>
+          </a:p>
+        </p:txBody>
+      </p:sp>
+      <p:sp>
+        <p:nvSpPr>
+          <p:cNvPr id="3" name="Rectangle 2"/>
+          <p:cNvSpPr/>
+          <p:nvPr/>
+        </p:nvSpPr>
+        <p:spPr>
+          <a:xfrm>
+            <a:off x="0" y="0"/>
+            <a:ext cx="12191695" cy="54864"/>
+          </a:xfrm>
+          <a:prstGeom prst="rect">
+            <a:avLst/>
+          </a:prstGeom>
+          <a:solidFill>
+            <a:srgbClr val="1A2129"/>
+          </a:solidFill>
+          <a:ln>
+            <a:noFill/>
+          </a:ln>
+          <a:effectLst/>
+        </p:spPr>
+        <p:style>
+          <a:lnRef idx="1">
+            <a:schemeClr val="accent1"/>
+          </a:lnRef>
+          <a:fillRef idx="3">
+            <a:schemeClr val="accent1"/>
+          </a:fillRef>
+          <a:effectRef idx="2">
+            <a:schemeClr val="accent1"/>
+          </a:effectRef>
+          <a:fontRef idx="minor">
+            <a:schemeClr val="lt1"/>
+          </a:fontRef>
+        </p:style>
+        <p:txBody>
+          <a:bodyPr rtlCol="0" anchor="ctr"/>
+          <a:lstStyle/>
+          <a:p>
+            <a:pPr algn="ctr"/>
+          </a:p>
+        </p:txBody>
+      </p:sp>
+      <p:sp>
+        <p:nvSpPr>
+          <p:cNvPr id="4" name="Rectangle 3"/>
+          <p:cNvSpPr/>
+          <p:nvPr/>
+        </p:nvSpPr>
+        <p:spPr>
+          <a:xfrm>
+            <a:off x="0" y="0"/>
+            <a:ext cx="15675036" cy="54864"/>
+          </a:xfrm>
+          <a:prstGeom prst="rect">
+            <a:avLst/>
+          </a:prstGeom>
+          <a:solidFill>
+            <a:srgbClr val="00E5A8"/>
+          </a:solidFill>
+          <a:ln>
+            <a:noFill/>
+          </a:ln>
+          <a:effectLst/>
+        </p:spPr>
+        <p:style>
+          <a:lnRef idx="1">
+            <a:schemeClr val="accent1"/>
+          </a:lnRef>
+          <a:fillRef idx="3">
+            <a:schemeClr val="accent1"/>
+          </a:fillRef>
+          <a:effectRef idx="2">
+            <a:schemeClr val="accent1"/>
+          </a:effectRef>
+          <a:fontRef idx="minor">
+            <a:schemeClr val="lt1"/>
+          </a:fontRef>
+        </p:style>
+        <p:txBody>
+          <a:bodyPr rtlCol="0" anchor="ctr"/>
+          <a:lstStyle/>
+          <a:p>
+            <a:pPr algn="ctr"/>
+          </a:p>
+        </p:txBody>
+      </p:sp>
+      <p:sp>
+        <p:nvSpPr>
+          <p:cNvPr id="5" name="TextBox 4"/>
+          <p:cNvSpPr txBox="1"/>
+          <p:nvPr/>
+        </p:nvSpPr>
+        <p:spPr>
+          <a:xfrm>
+            <a:off x="457200" y="320040"/>
+            <a:ext cx="10972800" cy="548640"/>
+          </a:xfrm>
+          <a:prstGeom prst="rect">
+            <a:avLst/>
+          </a:prstGeom>
+          <a:noFill/>
+        </p:spPr>
+        <p:txBody>
+          <a:bodyPr wrap="square" lIns="0" rIns="0" tIns="0" bIns="0" anchor="t">
+            <a:spAutoFit/>
+          </a:bodyPr>
+          <a:lstStyle/>
+          <a:p>
+            <a:pPr algn="l"/>
+            <a:r>
+              <a:rPr sz="2200" b="1" i="0">
+                <a:solidFill>
+                  <a:srgbClr val="00E5A8"/>
+                </a:solidFill>
+                <a:latin typeface="Helvetica Neue"/>
+              </a:rPr>
+              <a:t>Estándares y guías</a:t>
+            </a:r>
+          </a:p>
+        </p:txBody>
+      </p:sp>
+      <p:sp>
+        <p:nvSpPr>
+          <p:cNvPr id="6" name="Rectangle 5"/>
+          <p:cNvSpPr/>
+          <p:nvPr/>
+        </p:nvSpPr>
+        <p:spPr>
+          <a:xfrm>
+            <a:off x="457200" y="960120"/>
+            <a:ext cx="11247120" cy="18288"/>
+          </a:xfrm>
+          <a:prstGeom prst="rect">
+            <a:avLst/>
+          </a:prstGeom>
+          <a:solidFill>
+            <a:srgbClr val="1A2129"/>
+          </a:solidFill>
+          <a:ln>
+            <a:noFill/>
+          </a:ln>
+          <a:effectLst/>
+        </p:spPr>
+        <p:style>
+          <a:lnRef idx="1">
+            <a:schemeClr val="accent1"/>
+          </a:lnRef>
+          <a:fillRef idx="3">
+            <a:schemeClr val="accent1"/>
+          </a:fillRef>
+          <a:effectRef idx="2">
+            <a:schemeClr val="accent1"/>
+          </a:effectRef>
+          <a:fontRef idx="minor">
+            <a:schemeClr val="lt1"/>
+          </a:fontRef>
+        </p:style>
+        <p:txBody>
+          <a:bodyPr rtlCol="0" anchor="ctr"/>
+          <a:lstStyle/>
+          <a:p>
+            <a:pPr algn="ctr"/>
+          </a:p>
+        </p:txBody>
+      </p:sp>
+      <p:sp>
+        <p:nvSpPr>
+          <p:cNvPr id="7" name="TextBox 6"/>
+          <p:cNvSpPr txBox="1"/>
+          <p:nvPr/>
+        </p:nvSpPr>
+        <p:spPr>
+          <a:xfrm>
+            <a:off x="457200" y="6537960"/>
+            <a:ext cx="7315200" cy="274320"/>
+          </a:xfrm>
+          <a:prstGeom prst="rect">
+            <a:avLst/>
+          </a:prstGeom>
+          <a:noFill/>
+        </p:spPr>
+        <p:txBody>
+          <a:bodyPr wrap="square" lIns="0" rIns="0" tIns="0" bIns="0" anchor="t">
+            <a:spAutoFit/>
+          </a:bodyPr>
+          <a:lstStyle/>
+          <a:p>
+            <a:pPr algn="l"/>
+            <a:r>
+              <a:rPr sz="900" b="0" i="1">
+                <a:solidFill>
+                  <a:srgbClr val="8B96A3"/>
+                </a:solidFill>
+                <a:latin typeface="Helvetica Neue"/>
+              </a:rPr>
+              <a:t>Referencias</a:t>
+            </a:r>
+          </a:p>
+        </p:txBody>
+      </p:sp>
+      <p:sp>
+        <p:nvSpPr>
+          <p:cNvPr id="8" name="TextBox 7"/>
+          <p:cNvSpPr txBox="1"/>
+          <p:nvPr/>
+        </p:nvSpPr>
+        <p:spPr>
+          <a:xfrm>
+            <a:off x="10515600" y="6537960"/>
+            <a:ext cx="1371600" cy="274320"/>
+          </a:xfrm>
+          <a:prstGeom prst="rect">
+            <a:avLst/>
+          </a:prstGeom>
+          <a:noFill/>
+        </p:spPr>
+        <p:txBody>
+          <a:bodyPr wrap="square" lIns="0" rIns="0" tIns="0" bIns="0" anchor="t">
+            <a:spAutoFit/>
+          </a:bodyPr>
+          <a:lstStyle/>
+          <a:p>
+            <a:pPr algn="r"/>
+            <a:r>
+              <a:rPr sz="900" b="0" i="0">
+                <a:solidFill>
+                  <a:srgbClr val="8B96A3"/>
+                </a:solidFill>
+                <a:latin typeface="Helvetica Neue"/>
+              </a:rPr>
+              <a:t>36 / 28</a:t>
+            </a:r>
+          </a:p>
+        </p:txBody>
+      </p:sp>
+      <p:sp>
+        <p:nvSpPr>
+          <p:cNvPr id="9" name="Rounded Rectangle 8"/>
+          <p:cNvSpPr/>
+          <p:nvPr/>
+        </p:nvSpPr>
+        <p:spPr>
+          <a:xfrm>
+            <a:off x="640080" y="1280160"/>
+            <a:ext cx="5303520" cy="4572000"/>
+          </a:xfrm>
+          <a:prstGeom prst="roundRect">
+            <a:avLst>
+              <a:gd name="adj" fmla="val 8000"/>
+            </a:avLst>
+          </a:prstGeom>
+          <a:solidFill>
+            <a:srgbClr val="1A2129"/>
+          </a:solidFill>
+          <a:ln w="12700">
+            <a:solidFill>
+              <a:srgbClr val="00E5A8"/>
+            </a:solidFill>
+          </a:ln>
+          <a:effectLst/>
+        </p:spPr>
+        <p:style>
+          <a:lnRef idx="1">
+            <a:schemeClr val="accent1"/>
+          </a:lnRef>
+          <a:fillRef idx="3">
+            <a:schemeClr val="accent1"/>
+          </a:fillRef>
+          <a:effectRef idx="2">
+            <a:schemeClr val="accent1"/>
+          </a:effectRef>
+          <a:fontRef idx="minor">
+            <a:schemeClr val="lt1"/>
+          </a:fontRef>
+        </p:style>
+        <p:txBody>
+          <a:bodyPr rtlCol="0" anchor="ctr"/>
+          <a:lstStyle/>
+          <a:p/>
+        </p:txBody>
+      </p:sp>
+      <p:sp>
+        <p:nvSpPr>
+          <p:cNvPr id="10" name="TextBox 9"/>
+          <p:cNvSpPr txBox="1"/>
+          <p:nvPr/>
+        </p:nvSpPr>
+        <p:spPr>
+          <a:xfrm>
+            <a:off x="914400" y="1508760"/>
+            <a:ext cx="5303520" cy="457200"/>
+          </a:xfrm>
+          <a:prstGeom prst="rect">
+            <a:avLst/>
+          </a:prstGeom>
+          <a:noFill/>
+        </p:spPr>
+        <p:txBody>
+          <a:bodyPr wrap="square" lIns="0" rIns="0" tIns="0" bIns="0" anchor="t">
+            <a:spAutoFit/>
+          </a:bodyPr>
+          <a:lstStyle/>
+          <a:p>
+            <a:pPr algn="l"/>
+            <a:r>
+              <a:rPr sz="1800" b="1" i="0">
+                <a:solidFill>
+                  <a:srgbClr val="00E5A8"/>
+                </a:solidFill>
+                <a:latin typeface="Helvetica Neue"/>
+              </a:rPr>
+              <a:t>Estándares · RFCs</a:t>
+            </a:r>
+          </a:p>
+        </p:txBody>
+      </p:sp>
+      <p:sp>
+        <p:nvSpPr>
+          <p:cNvPr id="11" name="TextBox 10"/>
+          <p:cNvSpPr txBox="1"/>
+          <p:nvPr/>
+        </p:nvSpPr>
+        <p:spPr>
+          <a:xfrm>
+            <a:off x="914400" y="2148840"/>
+            <a:ext cx="5303520" cy="365760"/>
+          </a:xfrm>
+          <a:prstGeom prst="rect">
+            <a:avLst/>
+          </a:prstGeom>
+          <a:noFill/>
+        </p:spPr>
+        <p:txBody>
+          <a:bodyPr wrap="square" lIns="0" rIns="0" tIns="0" bIns="0" anchor="t">
+            <a:spAutoFit/>
+          </a:bodyPr>
+          <a:lstStyle/>
+          <a:p>
+            <a:pPr algn="l"/>
+            <a:r>
+              <a:rPr sz="1200" b="0" i="0">
+                <a:solidFill>
+                  <a:srgbClr val="E8EEF2"/>
+                </a:solidFill>
+                <a:latin typeface="Helvetica Neue"/>
+              </a:rPr>
+              <a:t>● NIST SP 800-38D — GCM</a:t>
+            </a:r>
+          </a:p>
+        </p:txBody>
+      </p:sp>
+      <p:sp>
+        <p:nvSpPr>
+          <p:cNvPr id="12" name="TextBox 11"/>
+          <p:cNvSpPr txBox="1"/>
+          <p:nvPr/>
+        </p:nvSpPr>
+        <p:spPr>
+          <a:xfrm>
+            <a:off x="914400" y="2606040"/>
+            <a:ext cx="5303520" cy="365760"/>
+          </a:xfrm>
+          <a:prstGeom prst="rect">
+            <a:avLst/>
+          </a:prstGeom>
+          <a:noFill/>
+        </p:spPr>
+        <p:txBody>
+          <a:bodyPr wrap="square" lIns="0" rIns="0" tIns="0" bIns="0" anchor="t">
+            <a:spAutoFit/>
+          </a:bodyPr>
+          <a:lstStyle/>
+          <a:p>
+            <a:pPr algn="l"/>
+            <a:r>
+              <a:rPr sz="1200" b="0" i="0">
+                <a:solidFill>
+                  <a:srgbClr val="E8EEF2"/>
+                </a:solidFill>
+                <a:latin typeface="Helvetica Neue"/>
+              </a:rPr>
+              <a:t>● RFC 7539 — ChaCha20 + Poly1305</a:t>
+            </a:r>
+          </a:p>
+        </p:txBody>
+      </p:sp>
+      <p:sp>
+        <p:nvSpPr>
+          <p:cNvPr id="13" name="TextBox 12"/>
+          <p:cNvSpPr txBox="1"/>
+          <p:nvPr/>
+        </p:nvSpPr>
+        <p:spPr>
+          <a:xfrm>
+            <a:off x="914400" y="3063240"/>
+            <a:ext cx="5303520" cy="365760"/>
+          </a:xfrm>
+          <a:prstGeom prst="rect">
+            <a:avLst/>
+          </a:prstGeom>
+          <a:noFill/>
+        </p:spPr>
+        <p:txBody>
+          <a:bodyPr wrap="square" lIns="0" rIns="0" tIns="0" bIns="0" anchor="t">
+            <a:spAutoFit/>
+          </a:bodyPr>
+          <a:lstStyle/>
+          <a:p>
+            <a:pPr algn="l"/>
+            <a:r>
+              <a:rPr sz="1200" b="0" i="0">
+                <a:solidFill>
+                  <a:srgbClr val="E8EEF2"/>
+                </a:solidFill>
+                <a:latin typeface="Helvetica Neue"/>
+              </a:rPr>
+              <a:t>● RFC 7748 — X25519 (Curve25519)</a:t>
+            </a:r>
+          </a:p>
+        </p:txBody>
+      </p:sp>
+      <p:sp>
+        <p:nvSpPr>
+          <p:cNvPr id="14" name="TextBox 13"/>
+          <p:cNvSpPr txBox="1"/>
+          <p:nvPr/>
+        </p:nvSpPr>
+        <p:spPr>
+          <a:xfrm>
+            <a:off x="914400" y="3520440"/>
+            <a:ext cx="5303520" cy="365760"/>
+          </a:xfrm>
+          <a:prstGeom prst="rect">
+            <a:avLst/>
+          </a:prstGeom>
+          <a:noFill/>
+        </p:spPr>
+        <p:txBody>
+          <a:bodyPr wrap="square" lIns="0" rIns="0" tIns="0" bIns="0" anchor="t">
+            <a:spAutoFit/>
+          </a:bodyPr>
+          <a:lstStyle/>
+          <a:p>
+            <a:pPr algn="l"/>
+            <a:r>
+              <a:rPr sz="1200" b="0" i="0">
+                <a:solidFill>
+                  <a:srgbClr val="E8EEF2"/>
+                </a:solidFill>
+                <a:latin typeface="Helvetica Neue"/>
+              </a:rPr>
+              <a:t>● RFC 7914 — scrypt KDF</a:t>
+            </a:r>
+          </a:p>
+        </p:txBody>
+      </p:sp>
+      <p:sp>
+        <p:nvSpPr>
+          <p:cNvPr id="15" name="TextBox 14"/>
+          <p:cNvSpPr txBox="1"/>
+          <p:nvPr/>
+        </p:nvSpPr>
+        <p:spPr>
+          <a:xfrm>
+            <a:off x="914400" y="3977640"/>
+            <a:ext cx="5303520" cy="365760"/>
+          </a:xfrm>
+          <a:prstGeom prst="rect">
+            <a:avLst/>
+          </a:prstGeom>
+          <a:noFill/>
+        </p:spPr>
+        <p:txBody>
+          <a:bodyPr wrap="square" lIns="0" rIns="0" tIns="0" bIns="0" anchor="t">
+            <a:spAutoFit/>
+          </a:bodyPr>
+          <a:lstStyle/>
+          <a:p>
+            <a:pPr algn="l"/>
+            <a:r>
+              <a:rPr sz="1200" b="0" i="0">
+                <a:solidFill>
+                  <a:srgbClr val="E8EEF2"/>
+                </a:solidFill>
+                <a:latin typeface="Helvetica Neue"/>
+              </a:rPr>
+              <a:t>● RFC 8032 — Ed25519 (EdDSA)</a:t>
+            </a:r>
+          </a:p>
+        </p:txBody>
+      </p:sp>
+      <p:sp>
+        <p:nvSpPr>
+          <p:cNvPr id="16" name="TextBox 15"/>
+          <p:cNvSpPr txBox="1"/>
+          <p:nvPr/>
+        </p:nvSpPr>
+        <p:spPr>
+          <a:xfrm>
+            <a:off x="914400" y="4434840"/>
+            <a:ext cx="5303520" cy="365760"/>
+          </a:xfrm>
+          <a:prstGeom prst="rect">
+            <a:avLst/>
+          </a:prstGeom>
+          <a:noFill/>
+        </p:spPr>
+        <p:txBody>
+          <a:bodyPr wrap="square" lIns="0" rIns="0" tIns="0" bIns="0" anchor="t">
+            <a:spAutoFit/>
+          </a:bodyPr>
+          <a:lstStyle/>
+          <a:p>
+            <a:pPr algn="l"/>
+            <a:r>
+              <a:rPr sz="1200" b="0" i="0">
+                <a:solidFill>
+                  <a:srgbClr val="E8EEF2"/>
+                </a:solidFill>
+                <a:latin typeface="Helvetica Neue"/>
+              </a:rPr>
+              <a:t>● RFC 9180 — HPKE</a:t>
+            </a:r>
+          </a:p>
+        </p:txBody>
+      </p:sp>
+      <p:sp>
+        <p:nvSpPr>
+          <p:cNvPr id="17" name="TextBox 16"/>
+          <p:cNvSpPr txBox="1"/>
+          <p:nvPr/>
+        </p:nvSpPr>
+        <p:spPr>
+          <a:xfrm>
+            <a:off x="914400" y="4892040"/>
+            <a:ext cx="5303520" cy="365760"/>
+          </a:xfrm>
+          <a:prstGeom prst="rect">
+            <a:avLst/>
+          </a:prstGeom>
+          <a:noFill/>
+        </p:spPr>
+        <p:txBody>
+          <a:bodyPr wrap="square" lIns="0" rIns="0" tIns="0" bIns="0" anchor="t">
+            <a:spAutoFit/>
+          </a:bodyPr>
+          <a:lstStyle/>
+          <a:p>
+            <a:pPr algn="l"/>
+            <a:r>
+              <a:rPr sz="1200" b="0" i="0">
+                <a:solidFill>
+                  <a:srgbClr val="E8EEF2"/>
+                </a:solidFill>
+                <a:latin typeface="Helvetica Neue"/>
+              </a:rPr>
+              <a:t>● RFC 5869 — HKDF</a:t>
+            </a:r>
+          </a:p>
+        </p:txBody>
+      </p:sp>
+      <p:sp>
+        <p:nvSpPr>
+          <p:cNvPr id="18" name="Rounded Rectangle 17"/>
+          <p:cNvSpPr/>
+          <p:nvPr/>
+        </p:nvSpPr>
+        <p:spPr>
+          <a:xfrm>
+            <a:off x="6217920" y="1280160"/>
+            <a:ext cx="5303520" cy="4572000"/>
+          </a:xfrm>
+          <a:prstGeom prst="roundRect">
+            <a:avLst>
+              <a:gd name="adj" fmla="val 8000"/>
+            </a:avLst>
+          </a:prstGeom>
+          <a:solidFill>
+            <a:srgbClr val="1A2129"/>
+          </a:solidFill>
+          <a:ln w="12700">
+            <a:solidFill>
+              <a:srgbClr val="6C8EFF"/>
+            </a:solidFill>
+          </a:ln>
+          <a:effectLst/>
+        </p:spPr>
+        <p:style>
+          <a:lnRef idx="1">
+            <a:schemeClr val="accent1"/>
+          </a:lnRef>
+          <a:fillRef idx="3">
+            <a:schemeClr val="accent1"/>
+          </a:fillRef>
+          <a:effectRef idx="2">
+            <a:schemeClr val="accent1"/>
+          </a:effectRef>
+          <a:fontRef idx="minor">
+            <a:schemeClr val="lt1"/>
+          </a:fontRef>
+        </p:style>
+        <p:txBody>
+          <a:bodyPr rtlCol="0" anchor="ctr"/>
+          <a:lstStyle/>
+          <a:p/>
+        </p:txBody>
+      </p:sp>
+      <p:sp>
+        <p:nvSpPr>
+          <p:cNvPr id="19" name="TextBox 18"/>
+          <p:cNvSpPr txBox="1"/>
+          <p:nvPr/>
+        </p:nvSpPr>
+        <p:spPr>
+          <a:xfrm>
+            <a:off x="6492240" y="1508760"/>
+            <a:ext cx="5303520" cy="457200"/>
+          </a:xfrm>
+          <a:prstGeom prst="rect">
+            <a:avLst/>
+          </a:prstGeom>
+          <a:noFill/>
+        </p:spPr>
+        <p:txBody>
+          <a:bodyPr wrap="square" lIns="0" rIns="0" tIns="0" bIns="0" anchor="t">
+            <a:spAutoFit/>
+          </a:bodyPr>
+          <a:lstStyle/>
+          <a:p>
+            <a:pPr algn="l"/>
+            <a:r>
+              <a:rPr sz="1800" b="1" i="0">
+                <a:solidFill>
+                  <a:srgbClr val="6C8EFF"/>
+                </a:solidFill>
+                <a:latin typeface="Helvetica Neue"/>
+              </a:rPr>
+              <a:t>Guías · Librerías</a:t>
+            </a:r>
+          </a:p>
+        </p:txBody>
+      </p:sp>
+      <p:sp>
+        <p:nvSpPr>
+          <p:cNvPr id="20" name="TextBox 19"/>
+          <p:cNvSpPr txBox="1"/>
+          <p:nvPr/>
+        </p:nvSpPr>
+        <p:spPr>
+          <a:xfrm>
+            <a:off x="6492240" y="2148840"/>
+            <a:ext cx="5303520" cy="365760"/>
+          </a:xfrm>
+          <a:prstGeom prst="rect">
+            <a:avLst/>
+          </a:prstGeom>
+          <a:noFill/>
+        </p:spPr>
+        <p:txBody>
+          <a:bodyPr wrap="square" lIns="0" rIns="0" tIns="0" bIns="0" anchor="t">
+            <a:spAutoFit/>
+          </a:bodyPr>
+          <a:lstStyle/>
+          <a:p>
+            <a:pPr algn="l"/>
+            <a:r>
+              <a:rPr sz="1200" b="0" i="0">
+                <a:solidFill>
+                  <a:srgbClr val="E8EEF2"/>
+                </a:solidFill>
+                <a:latin typeface="Helvetica Neue"/>
+              </a:rPr>
+              <a:t>● OWASP Password Storage Cheat Sheet</a:t>
+            </a:r>
+          </a:p>
+        </p:txBody>
+      </p:sp>
+      <p:sp>
+        <p:nvSpPr>
+          <p:cNvPr id="21" name="TextBox 20"/>
+          <p:cNvSpPr txBox="1"/>
+          <p:nvPr/>
+        </p:nvSpPr>
+        <p:spPr>
+          <a:xfrm>
+            <a:off x="6492240" y="2606040"/>
+            <a:ext cx="5303520" cy="365760"/>
+          </a:xfrm>
+          <a:prstGeom prst="rect">
+            <a:avLst/>
+          </a:prstGeom>
+          <a:noFill/>
+        </p:spPr>
+        <p:txBody>
+          <a:bodyPr wrap="square" lIns="0" rIns="0" tIns="0" bIns="0" anchor="t">
+            <a:spAutoFit/>
+          </a:bodyPr>
+          <a:lstStyle/>
+          <a:p>
+            <a:pPr algn="l"/>
+            <a:r>
+              <a:rPr sz="1200" b="0" i="0">
+                <a:solidFill>
+                  <a:srgbClr val="E8EEF2"/>
+                </a:solidFill>
+                <a:latin typeface="Helvetica Neue"/>
+              </a:rPr>
+              <a:t>● OWASP Cryptographic Storage</a:t>
+            </a:r>
+          </a:p>
+        </p:txBody>
+      </p:sp>
+      <p:sp>
+        <p:nvSpPr>
+          <p:cNvPr id="22" name="TextBox 21"/>
+          <p:cNvSpPr txBox="1"/>
+          <p:nvPr/>
+        </p:nvSpPr>
+        <p:spPr>
+          <a:xfrm>
+            <a:off x="6492240" y="3063240"/>
+            <a:ext cx="5303520" cy="365760"/>
+          </a:xfrm>
+          <a:prstGeom prst="rect">
+            <a:avLst/>
+          </a:prstGeom>
+          <a:noFill/>
+        </p:spPr>
+        <p:txBody>
+          <a:bodyPr wrap="square" lIns="0" rIns="0" tIns="0" bIns="0" anchor="t">
+            <a:spAutoFit/>
+          </a:bodyPr>
+          <a:lstStyle/>
+          <a:p>
+            <a:pPr algn="l"/>
+            <a:r>
+              <a:rPr sz="1200" b="0" i="0">
+                <a:solidFill>
+                  <a:srgbClr val="E8EEF2"/>
+                </a:solidFill>
+                <a:latin typeface="Helvetica Neue"/>
+              </a:rPr>
+              <a:t>● libsodium / NaCl misuse-resistant</a:t>
+            </a:r>
+          </a:p>
+        </p:txBody>
+      </p:sp>
+      <p:sp>
+        <p:nvSpPr>
+          <p:cNvPr id="23" name="TextBox 22"/>
+          <p:cNvSpPr txBox="1"/>
+          <p:nvPr/>
+        </p:nvSpPr>
+        <p:spPr>
+          <a:xfrm>
+            <a:off x="6492240" y="3520440"/>
+            <a:ext cx="5303520" cy="365760"/>
+          </a:xfrm>
+          <a:prstGeom prst="rect">
+            <a:avLst/>
+          </a:prstGeom>
+          <a:noFill/>
+        </p:spPr>
+        <p:txBody>
+          <a:bodyPr wrap="square" lIns="0" rIns="0" tIns="0" bIns="0" anchor="t">
+            <a:spAutoFit/>
+          </a:bodyPr>
+          <a:lstStyle/>
+          <a:p>
+            <a:pPr algn="l"/>
+            <a:r>
+              <a:rPr sz="1200" b="0" i="0">
+                <a:solidFill>
+                  <a:srgbClr val="E8EEF2"/>
+                </a:solidFill>
+                <a:latin typeface="Helvetica Neue"/>
+              </a:rPr>
+              <a:t>● cryptography (pyca) — primitivas</a:t>
+            </a:r>
+          </a:p>
+        </p:txBody>
+      </p:sp>
+      <p:sp>
+        <p:nvSpPr>
+          <p:cNvPr id="24" name="TextBox 23"/>
+          <p:cNvSpPr txBox="1"/>
+          <p:nvPr/>
+        </p:nvSpPr>
+        <p:spPr>
+          <a:xfrm>
+            <a:off x="6492240" y="3977640"/>
+            <a:ext cx="5303520" cy="365760"/>
+          </a:xfrm>
+          <a:prstGeom prst="rect">
+            <a:avLst/>
+          </a:prstGeom>
+          <a:noFill/>
+        </p:spPr>
+        <p:txBody>
+          <a:bodyPr wrap="square" lIns="0" rIns="0" tIns="0" bIns="0" anchor="t">
+            <a:spAutoFit/>
+          </a:bodyPr>
+          <a:lstStyle/>
+          <a:p>
+            <a:pPr algn="l"/>
+            <a:r>
+              <a:rPr sz="1200" b="0" i="0">
+                <a:solidFill>
+                  <a:srgbClr val="E8EEF2"/>
+                </a:solidFill>
+                <a:latin typeface="Helvetica Neue"/>
+              </a:rPr>
+              <a:t>● hashlib.scrypt — stdlib</a:t>
+            </a:r>
+          </a:p>
+        </p:txBody>
+      </p:sp>
+      <p:sp>
+        <p:nvSpPr>
+          <p:cNvPr id="25" name="TextBox 24"/>
+          <p:cNvSpPr txBox="1"/>
+          <p:nvPr/>
+        </p:nvSpPr>
+        <p:spPr>
+          <a:xfrm>
+            <a:off x="6492240" y="4434840"/>
+            <a:ext cx="5303520" cy="365760"/>
+          </a:xfrm>
+          <a:prstGeom prst="rect">
+            <a:avLst/>
+          </a:prstGeom>
+          <a:noFill/>
+        </p:spPr>
+        <p:txBody>
+          <a:bodyPr wrap="square" lIns="0" rIns="0" tIns="0" bIns="0" anchor="t">
+            <a:spAutoFit/>
+          </a:bodyPr>
+          <a:lstStyle/>
+          <a:p>
+            <a:pPr algn="l"/>
+            <a:r>
+              <a:rPr sz="1200" b="0" i="0">
+                <a:solidFill>
+                  <a:srgbClr val="E8EEF2"/>
+                </a:solidFill>
+                <a:latin typeface="Helvetica Neue"/>
+              </a:rPr>
+              <a:t>● pytest — testing</a:t>
+            </a:r>
+          </a:p>
+        </p:txBody>
+      </p:sp>
+    </p:spTree>
+  </p:cSld>
+  <p:clrMapOvr>
+    <a:masterClrMapping/>
+  </p:clrMapOvr>
+</p:sld>
+</file>
+
+<file path=ppt/slides/slide37.xml><?xml version="1.0" encoding="utf-8"?>
+<p:sld xmlns:a="http://schemas.openxmlformats.org/drawingml/2006/main" xmlns:p="http://schemas.openxmlformats.org/presentationml/2006/main" xmlns:r="http://schemas.openxmlformats.org/officeDocument/2006/relationships">
+  <p:cSld>
+    <p:spTree>
+      <p:nvGrpSpPr>
+        <p:cNvPr id="1" name=""/>
+        <p:cNvGrpSpPr/>
+        <p:nvPr/>
+      </p:nvGrpSpPr>
+      <p:grpSpPr/>
+      <p:sp>
+        <p:nvSpPr>
+          <p:cNvPr id="2" name="Rectangle 1"/>
+          <p:cNvSpPr/>
+          <p:nvPr/>
+        </p:nvSpPr>
+        <p:spPr>
+          <a:xfrm>
+            <a:off x="0" y="0"/>
+            <a:ext cx="12191695" cy="6858000"/>
+          </a:xfrm>
+          <a:prstGeom prst="rect">
+            <a:avLst/>
+          </a:prstGeom>
+          <a:solidFill>
+            <a:srgbClr val="0F1419"/>
+          </a:solidFill>
+          <a:ln>
+            <a:noFill/>
+          </a:ln>
+          <a:effectLst/>
+        </p:spPr>
+        <p:style>
+          <a:lnRef idx="1">
+            <a:schemeClr val="accent1"/>
+          </a:lnRef>
+          <a:fillRef idx="3">
+            <a:schemeClr val="accent1"/>
+          </a:fillRef>
+          <a:effectRef idx="2">
+            <a:schemeClr val="accent1"/>
+          </a:effectRef>
+          <a:fontRef idx="minor">
+            <a:schemeClr val="lt1"/>
+          </a:fontRef>
+        </p:style>
+        <p:txBody>
+          <a:bodyPr rtlCol="0" anchor="ctr"/>
+          <a:lstStyle/>
+          <a:p>
+            <a:pPr algn="ctr"/>
+          </a:p>
+        </p:txBody>
+      </p:sp>
+      <p:sp>
+        <p:nvSpPr>
+          <p:cNvPr id="3" name="Rectangle 2"/>
+          <p:cNvSpPr/>
+          <p:nvPr/>
+        </p:nvSpPr>
+        <p:spPr>
+          <a:xfrm>
+            <a:off x="0" y="0"/>
+            <a:ext cx="12191695" cy="54864"/>
+          </a:xfrm>
+          <a:prstGeom prst="rect">
+            <a:avLst/>
+          </a:prstGeom>
+          <a:solidFill>
+            <a:srgbClr val="1A2129"/>
+          </a:solidFill>
+          <a:ln>
+            <a:noFill/>
+          </a:ln>
+          <a:effectLst/>
+        </p:spPr>
+        <p:style>
+          <a:lnRef idx="1">
+            <a:schemeClr val="accent1"/>
+          </a:lnRef>
+          <a:fillRef idx="3">
+            <a:schemeClr val="accent1"/>
+          </a:fillRef>
+          <a:effectRef idx="2">
+            <a:schemeClr val="accent1"/>
+          </a:effectRef>
+          <a:fontRef idx="minor">
+            <a:schemeClr val="lt1"/>
+          </a:fontRef>
+        </p:style>
+        <p:txBody>
+          <a:bodyPr rtlCol="0" anchor="ctr"/>
+          <a:lstStyle/>
+          <a:p>
+            <a:pPr algn="ctr"/>
+          </a:p>
+        </p:txBody>
+      </p:sp>
+      <p:sp>
+        <p:nvSpPr>
+          <p:cNvPr id="4" name="Rectangle 3"/>
+          <p:cNvSpPr/>
+          <p:nvPr/>
+        </p:nvSpPr>
+        <p:spPr>
+          <a:xfrm>
+            <a:off x="0" y="0"/>
+            <a:ext cx="16110454" cy="54864"/>
+          </a:xfrm>
+          <a:prstGeom prst="rect">
+            <a:avLst/>
+          </a:prstGeom>
+          <a:solidFill>
+            <a:srgbClr val="00E5A8"/>
+          </a:solidFill>
+          <a:ln>
+            <a:noFill/>
+          </a:ln>
+          <a:effectLst/>
+        </p:spPr>
+        <p:style>
+          <a:lnRef idx="1">
+            <a:schemeClr val="accent1"/>
+          </a:lnRef>
+          <a:fillRef idx="3">
+            <a:schemeClr val="accent1"/>
+          </a:fillRef>
+          <a:effectRef idx="2">
+            <a:schemeClr val="accent1"/>
+          </a:effectRef>
+          <a:fontRef idx="minor">
+            <a:schemeClr val="lt1"/>
+          </a:fontRef>
+        </p:style>
+        <p:txBody>
+          <a:bodyPr rtlCol="0" anchor="ctr"/>
+          <a:lstStyle/>
+          <a:p>
+            <a:pPr algn="ctr"/>
+          </a:p>
+        </p:txBody>
+      </p:sp>
+      <p:sp>
+        <p:nvSpPr>
+          <p:cNvPr id="5" name="TextBox 4"/>
+          <p:cNvSpPr txBox="1"/>
+          <p:nvPr/>
+        </p:nvSpPr>
+        <p:spPr>
+          <a:xfrm>
+            <a:off x="457200" y="320040"/>
+            <a:ext cx="10972800" cy="548640"/>
+          </a:xfrm>
+          <a:prstGeom prst="rect">
+            <a:avLst/>
+          </a:prstGeom>
+          <a:noFill/>
+        </p:spPr>
+        <p:txBody>
+          <a:bodyPr wrap="square" lIns="0" rIns="0" tIns="0" bIns="0" anchor="t">
+            <a:spAutoFit/>
+          </a:bodyPr>
+          <a:lstStyle/>
+          <a:p>
+            <a:pPr algn="l"/>
+            <a:r>
+              <a:rPr sz="2200" b="1" i="0">
+                <a:solidFill>
+                  <a:srgbClr val="00E5A8"/>
+                </a:solidFill>
+                <a:latin typeface="Helvetica Neue"/>
+              </a:rPr>
+              <a:t>Q&amp;A</a:t>
+            </a:r>
+          </a:p>
+        </p:txBody>
+      </p:sp>
+      <p:sp>
+        <p:nvSpPr>
+          <p:cNvPr id="6" name="Rectangle 5"/>
+          <p:cNvSpPr/>
+          <p:nvPr/>
+        </p:nvSpPr>
+        <p:spPr>
+          <a:xfrm>
+            <a:off x="457200" y="960120"/>
+            <a:ext cx="11247120" cy="18288"/>
+          </a:xfrm>
+          <a:prstGeom prst="rect">
+            <a:avLst/>
+          </a:prstGeom>
+          <a:solidFill>
+            <a:srgbClr val="1A2129"/>
+          </a:solidFill>
+          <a:ln>
+            <a:noFill/>
+          </a:ln>
+          <a:effectLst/>
+        </p:spPr>
+        <p:style>
+          <a:lnRef idx="1">
+            <a:schemeClr val="accent1"/>
+          </a:lnRef>
+          <a:fillRef idx="3">
+            <a:schemeClr val="accent1"/>
+          </a:fillRef>
+          <a:effectRef idx="2">
+            <a:schemeClr val="accent1"/>
+          </a:effectRef>
+          <a:fontRef idx="minor">
+            <a:schemeClr val="lt1"/>
+          </a:fontRef>
+        </p:style>
+        <p:txBody>
+          <a:bodyPr rtlCol="0" anchor="ctr"/>
+          <a:lstStyle/>
+          <a:p>
+            <a:pPr algn="ctr"/>
+          </a:p>
+        </p:txBody>
+      </p:sp>
+      <p:sp>
+        <p:nvSpPr>
+          <p:cNvPr id="7" name="TextBox 6"/>
+          <p:cNvSpPr txBox="1"/>
+          <p:nvPr/>
+        </p:nvSpPr>
+        <p:spPr>
+          <a:xfrm>
+            <a:off x="457200" y="6537960"/>
+            <a:ext cx="7315200" cy="274320"/>
+          </a:xfrm>
+          <a:prstGeom prst="rect">
+            <a:avLst/>
+          </a:prstGeom>
+          <a:noFill/>
+        </p:spPr>
+        <p:txBody>
+          <a:bodyPr wrap="square" lIns="0" rIns="0" tIns="0" bIns="0" anchor="t">
+            <a:spAutoFit/>
+          </a:bodyPr>
+          <a:lstStyle/>
+          <a:p>
+            <a:pPr algn="l"/>
+            <a:r>
+              <a:rPr sz="900" b="0" i="1">
+                <a:solidFill>
+                  <a:srgbClr val="8B96A3"/>
+                </a:solidFill>
+                <a:latin typeface="Helvetica Neue"/>
+              </a:rPr>
+              <a:t/>
+            </a:r>
+          </a:p>
+        </p:txBody>
+      </p:sp>
+      <p:sp>
+        <p:nvSpPr>
+          <p:cNvPr id="8" name="TextBox 7"/>
+          <p:cNvSpPr txBox="1"/>
+          <p:nvPr/>
+        </p:nvSpPr>
+        <p:spPr>
+          <a:xfrm>
+            <a:off x="10515600" y="6537960"/>
+            <a:ext cx="1371600" cy="274320"/>
+          </a:xfrm>
+          <a:prstGeom prst="rect">
+            <a:avLst/>
+          </a:prstGeom>
+          <a:noFill/>
+        </p:spPr>
+        <p:txBody>
+          <a:bodyPr wrap="square" lIns="0" rIns="0" tIns="0" bIns="0" anchor="t">
+            <a:spAutoFit/>
+          </a:bodyPr>
+          <a:lstStyle/>
+          <a:p>
+            <a:pPr algn="r"/>
+            <a:r>
+              <a:rPr sz="900" b="0" i="0">
+                <a:solidFill>
+                  <a:srgbClr val="8B96A3"/>
+                </a:solidFill>
+                <a:latin typeface="Helvetica Neue"/>
+              </a:rPr>
+              <a:t>37 / 28</a:t>
             </a:r>
           </a:p>
         </p:txBody>
